--- a/report/ML_Term_Project_Slides.pptx
+++ b/report/ML_Term_Project_Slides.pptx
@@ -3147,7 +3147,7 @@
         </p:nvSpPr>
         <p:spPr>
           <a:xfrm>
-            <a:off x="0" y="2743200"/>
+            <a:off x="0" y="2834640"/>
             <a:ext cx="12188952" cy="54864"/>
           </a:xfrm>
           <a:prstGeom prst="rect">
@@ -3190,8 +3190,8 @@
         </p:nvSpPr>
         <p:spPr>
           <a:xfrm>
-            <a:off x="914400" y="731520"/>
-            <a:ext cx="10332720" cy="1097280"/>
+            <a:off x="914400" y="640080"/>
+            <a:ext cx="10332720" cy="914400"/>
           </a:xfrm>
           <a:prstGeom prst="rect">
             <a:avLst/>
@@ -3206,12 +3206,12 @@
           <a:p>
             <a:pPr algn="ctr"/>
             <a:r>
-              <a:rPr sz="4200" b="1">
+              <a:rPr sz="4000" b="1">
                 <a:solidFill>
                   <a:srgbClr val="FFFFFF"/>
                 </a:solidFill>
               </a:rPr>
-              <a:t>Physics Error Estimation</a:t>
+              <a:t>로봇 시뮬레이션 환경의</a:t>
             </a:r>
           </a:p>
         </p:txBody>
@@ -3224,8 +3224,8 @@
         </p:nvSpPr>
         <p:spPr>
           <a:xfrm>
-            <a:off x="914400" y="1600200"/>
-            <a:ext cx="10332720" cy="822960"/>
+            <a:off x="914400" y="1463040"/>
+            <a:ext cx="10332720" cy="914400"/>
           </a:xfrm>
           <a:prstGeom prst="rect">
             <a:avLst/>
@@ -3240,12 +3240,12 @@
           <a:p>
             <a:pPr algn="ctr"/>
             <a:r>
-              <a:rPr sz="2800" b="0">
+              <a:rPr sz="3000" b="0">
                 <a:solidFill>
                   <a:srgbClr val="AACCFF"/>
                 </a:solidFill>
               </a:rPr>
-              <a:t>in Robot Simulation via Machine Learning</a:t>
+              <a:t>수치 적분 오차 예측을 위한 머신러닝</a:t>
             </a:r>
           </a:p>
         </p:txBody>
@@ -3258,7 +3258,7 @@
         </p:nvSpPr>
         <p:spPr>
           <a:xfrm>
-            <a:off x="914400" y="3017520"/>
+            <a:off x="914400" y="3063240"/>
             <a:ext cx="10332720" cy="548640"/>
           </a:xfrm>
           <a:prstGeom prst="rect">
@@ -3274,12 +3274,12 @@
           <a:p>
             <a:pPr algn="ctr"/>
             <a:r>
-              <a:rPr sz="1800" b="0">
+              <a:rPr sz="1700" b="0">
                 <a:solidFill>
                   <a:srgbClr val="F0F0F0"/>
                 </a:solidFill>
               </a:rPr>
-              <a:t>[2026-1] Machine Learning — Term Project</a:t>
+              <a:t>[2026-1] Machine Learning — 텀 프로젝트</a:t>
             </a:r>
           </a:p>
         </p:txBody>
@@ -3292,7 +3292,7 @@
         </p:nvSpPr>
         <p:spPr>
           <a:xfrm>
-            <a:off x="914400" y="3566160"/>
+            <a:off x="914400" y="3611880"/>
             <a:ext cx="10332720" cy="457200"/>
           </a:xfrm>
           <a:prstGeom prst="rect">
@@ -3313,7 +3313,7 @@
                   <a:srgbClr val="F0F0F0"/>
                 </a:solidFill>
               </a:rPr>
-              <a:t>Inha University  |  June 1, 2026</a:t>
+              <a:t>인하대학교  |  2026년 6월 1일</a:t>
             </a:r>
           </a:p>
         </p:txBody>
@@ -3326,8 +3326,8 @@
         </p:nvSpPr>
         <p:spPr>
           <a:xfrm>
-            <a:off x="914400" y="5943600"/>
-            <a:ext cx="10332720" cy="548640"/>
+            <a:off x="914400" y="6035040"/>
+            <a:ext cx="10332720" cy="457200"/>
           </a:xfrm>
           <a:prstGeom prst="rect">
             <a:avLst/>
@@ -3379,7 +3379,7 @@
         <p:spPr>
           <a:xfrm>
             <a:off x="0" y="0"/>
-            <a:ext cx="12188952" cy="1005840"/>
+            <a:ext cx="12188952" cy="960120"/>
           </a:xfrm>
           <a:prstGeom prst="rect">
             <a:avLst/>
@@ -3421,8 +3421,8 @@
         </p:nvSpPr>
         <p:spPr>
           <a:xfrm>
-            <a:off x="274320" y="109728"/>
-            <a:ext cx="10058400" cy="731520"/>
+            <a:off x="320040" y="91440"/>
+            <a:ext cx="11430000" cy="594360"/>
           </a:xfrm>
           <a:prstGeom prst="rect">
             <a:avLst/>
@@ -3437,12 +3437,12 @@
           <a:p>
             <a:pPr algn="l"/>
             <a:r>
-              <a:rPr sz="2800" b="1">
+              <a:rPr sz="2600" b="1">
                 <a:solidFill>
                   <a:srgbClr val="FFFFFF"/>
                 </a:solidFill>
               </a:rPr>
-              <a:t>Problem Statement</a:t>
+              <a:t>문제 정의</a:t>
             </a:r>
           </a:p>
         </p:txBody>
@@ -3455,8 +3455,8 @@
         </p:nvSpPr>
         <p:spPr>
           <a:xfrm>
-            <a:off x="274320" y="685800"/>
-            <a:ext cx="10058400" cy="457200"/>
+            <a:off x="320040" y="621792"/>
+            <a:ext cx="11430000" cy="347472"/>
           </a:xfrm>
           <a:prstGeom prst="rect">
             <a:avLst/>
@@ -3471,12 +3471,12 @@
           <a:p>
             <a:pPr algn="l"/>
             <a:r>
-              <a:rPr sz="1400" b="0">
-                <a:solidFill>
-                  <a:srgbClr val="AABBFF"/>
+              <a:rPr sz="1300" b="0">
+                <a:solidFill>
+                  <a:srgbClr val="AACCFF"/>
                 </a:solidFill>
               </a:rPr>
-              <a:t>Why does integration error matter?</a:t>
+              <a:t>수치 적분 오차는 왜 중요한가?</a:t>
             </a:r>
           </a:p>
         </p:txBody>
@@ -3489,7 +3489,7 @@
         </p:nvSpPr>
         <p:spPr>
           <a:xfrm>
-            <a:off x="0" y="1005840"/>
+            <a:off x="0" y="960120"/>
             <a:ext cx="12188952" cy="36576"/>
           </a:xfrm>
           <a:prstGeom prst="rect">
@@ -3532,8 +3532,8 @@
         </p:nvSpPr>
         <p:spPr>
           <a:xfrm>
-            <a:off x="365760" y="1188720"/>
-            <a:ext cx="10972800" cy="457200"/>
+            <a:off x="365760" y="1097280"/>
+            <a:ext cx="11430000" cy="411480"/>
           </a:xfrm>
           <a:prstGeom prst="rect">
             <a:avLst/>
@@ -3548,12 +3548,12 @@
           <a:p>
             <a:pPr algn="l"/>
             <a:r>
-              <a:rPr sz="2000" b="1">
+              <a:rPr sz="1800" b="1">
                 <a:solidFill>
                   <a:srgbClr val="1A1A2E"/>
                 </a:solidFill>
               </a:rPr>
-              <a:t>The Sim-to-Real Gap</a:t>
+              <a:t>Sim-to-Real 격차 배경</a:t>
             </a:r>
           </a:p>
         </p:txBody>
@@ -3566,8 +3566,8 @@
         </p:nvSpPr>
         <p:spPr>
           <a:xfrm>
-            <a:off x="365760" y="1691640"/>
-            <a:ext cx="54864" cy="320040"/>
+            <a:off x="365760" y="1645920"/>
+            <a:ext cx="91440" cy="256032"/>
           </a:xfrm>
           <a:prstGeom prst="rect">
             <a:avLst/>
@@ -3609,8 +3609,8 @@
         </p:nvSpPr>
         <p:spPr>
           <a:xfrm>
-            <a:off x="548640" y="1664208"/>
-            <a:ext cx="10789920" cy="457200"/>
+            <a:off x="530352" y="1572768"/>
+            <a:ext cx="11173968" cy="420624"/>
           </a:xfrm>
           <a:prstGeom prst="rect">
             <a:avLst/>
@@ -3625,12 +3625,12 @@
           <a:p>
             <a:pPr algn="l"/>
             <a:r>
-              <a:rPr sz="1500" b="0">
+              <a:rPr sz="1400" b="0">
                 <a:solidFill>
                   <a:srgbClr val="1A1A2E"/>
                 </a:solidFill>
               </a:rPr>
-              <a:t>Robot simulators use discrete-time numerical integration to approximate continuous physics.</a:t>
+              <a:t>로봇 시뮬레이터는 연속 시간 물리 법칙을 이산 시간으로 수치 적분하여 근사한다.</a:t>
             </a:r>
           </a:p>
         </p:txBody>
@@ -3643,8 +3643,8 @@
         </p:nvSpPr>
         <p:spPr>
           <a:xfrm>
-            <a:off x="365760" y="2331720"/>
-            <a:ext cx="54864" cy="320040"/>
+            <a:off x="365760" y="2066544"/>
+            <a:ext cx="91440" cy="256032"/>
           </a:xfrm>
           <a:prstGeom prst="rect">
             <a:avLst/>
@@ -3686,8 +3686,8 @@
         </p:nvSpPr>
         <p:spPr>
           <a:xfrm>
-            <a:off x="548640" y="2304288"/>
-            <a:ext cx="10789920" cy="457200"/>
+            <a:off x="530352" y="1993392"/>
+            <a:ext cx="11173968" cy="420624"/>
           </a:xfrm>
           <a:prstGeom prst="rect">
             <a:avLst/>
@@ -3702,12 +3702,12 @@
           <a:p>
             <a:pPr algn="l"/>
             <a:r>
-              <a:rPr sz="1500" b="0">
+              <a:rPr sz="1400" b="0">
                 <a:solidFill>
                   <a:srgbClr val="1A1A2E"/>
                 </a:solidFill>
               </a:rPr>
-              <a:t>Gymnasium Pendulum-v1 uses 1st-order Euler integration (dt = 0.05 s).</a:t>
+              <a:t>Gymnasium Pendulum-v1은 1차 Euler 적분(dt = 0.05 s)을 사용한다.</a:t>
             </a:r>
           </a:p>
         </p:txBody>
@@ -3720,8 +3720,8 @@
         </p:nvSpPr>
         <p:spPr>
           <a:xfrm>
-            <a:off x="365760" y="2971800"/>
-            <a:ext cx="54864" cy="320040"/>
+            <a:off x="365760" y="2487168"/>
+            <a:ext cx="91440" cy="256032"/>
           </a:xfrm>
           <a:prstGeom prst="rect">
             <a:avLst/>
@@ -3763,8 +3763,8 @@
         </p:nvSpPr>
         <p:spPr>
           <a:xfrm>
-            <a:off x="548640" y="2944368"/>
-            <a:ext cx="10789920" cy="457200"/>
+            <a:off x="530352" y="2414016"/>
+            <a:ext cx="11173968" cy="420624"/>
           </a:xfrm>
           <a:prstGeom prst="rect">
             <a:avLst/>
@@ -3779,12 +3779,12 @@
           <a:p>
             <a:pPr algn="l"/>
             <a:r>
-              <a:rPr sz="1500" b="0">
+              <a:rPr sz="1400" b="0">
                 <a:solidFill>
                   <a:srgbClr val="1A1A2E"/>
                 </a:solidFill>
               </a:rPr>
-              <a:t>Euler error accumulates over long trajectories, affecting controller quality.</a:t>
+              <a:t>Euler 오차는 긴 궤적에서 누적되어 컨트롤러 성능 저하를 유발한다.</a:t>
             </a:r>
           </a:p>
         </p:txBody>
@@ -3797,8 +3797,8 @@
         </p:nvSpPr>
         <p:spPr>
           <a:xfrm>
-            <a:off x="365760" y="3291840"/>
-            <a:ext cx="10972800" cy="457200"/>
+            <a:off x="365760" y="3337560"/>
+            <a:ext cx="11430000" cy="411480"/>
           </a:xfrm>
           <a:prstGeom prst="rect">
             <a:avLst/>
@@ -3813,12 +3813,12 @@
           <a:p>
             <a:pPr algn="l"/>
             <a:r>
-              <a:rPr sz="2000" b="1">
+              <a:rPr sz="1800" b="1">
                 <a:solidFill>
                   <a:srgbClr val="1A1A2E"/>
                 </a:solidFill>
               </a:rPr>
-              <a:t>Our Goal</a:t>
+              <a:t>프로젝트 목표</a:t>
             </a:r>
           </a:p>
         </p:txBody>
@@ -3831,8 +3831,8 @@
         </p:nvSpPr>
         <p:spPr>
           <a:xfrm>
-            <a:off x="365760" y="3749039"/>
-            <a:ext cx="11430000" cy="1463040"/>
+            <a:off x="365760" y="3822191"/>
+            <a:ext cx="11430000" cy="1371600"/>
           </a:xfrm>
           <a:prstGeom prst="rect">
             <a:avLst/>
@@ -3874,8 +3874,8 @@
         </p:nvSpPr>
         <p:spPr>
           <a:xfrm>
-            <a:off x="548640" y="3840480"/>
-            <a:ext cx="11064240" cy="1097280"/>
+            <a:off x="594360" y="3913632"/>
+            <a:ext cx="11064240" cy="914400"/>
           </a:xfrm>
           <a:prstGeom prst="rect">
             <a:avLst/>
@@ -3895,8 +3895,8 @@
                   <a:srgbClr val="1A1A2E"/>
                 </a:solidFill>
               </a:rPr>
-              <a:t>Train ML models to predict the integration error
-(Euler result  minus  RK4 result) given the current state &amp; action.</a:t>
+              <a:t>머신러닝 모델로 수치 적분 오차를 예측한다
+(Euler 결과 - RK4 결과 = 보정해야 할 오차)</a:t>
             </a:r>
           </a:p>
         </p:txBody>
@@ -3909,7 +3909,7 @@
         </p:nvSpPr>
         <p:spPr>
           <a:xfrm>
-            <a:off x="548640" y="4480560"/>
+            <a:off x="594360" y="4572000"/>
             <a:ext cx="11064240" cy="457200"/>
           </a:xfrm>
           <a:prstGeom prst="rect">
@@ -3930,7 +3930,7 @@
                   <a:srgbClr val="0F3C96"/>
                 </a:solidFill>
               </a:rPr>
-              <a:t>Input: (cosθ, sinθ, θ̇, τ)   →   Output: (err_theta, err_theta_dot)</a:t>
+              <a:t>입력: (cosθ, sinθ, θ̇, τ)   →   출력: (err_theta, err_theta_dot)</a:t>
             </a:r>
           </a:p>
         </p:txBody>
@@ -3943,8 +3943,8 @@
         </p:nvSpPr>
         <p:spPr>
           <a:xfrm>
-            <a:off x="365760" y="5486400"/>
-            <a:ext cx="11430000" cy="457200"/>
+            <a:off x="365760" y="5623560"/>
+            <a:ext cx="11430000" cy="365760"/>
           </a:xfrm>
           <a:prstGeom prst="rect">
             <a:avLst/>
@@ -3964,7 +3964,7 @@
                   <a:srgbClr val="555555"/>
                 </a:solidFill>
               </a:rPr>
-              <a:t>Application: error compensation  |  sim-to-real transfer  |  adaptive integration</a:t>
+              <a:t>활용: 오차 보상(error compensation)  |  sim-to-real 전이  |  적응형 수치 적분</a:t>
             </a:r>
           </a:p>
         </p:txBody>
@@ -3996,7 +3996,7 @@
         <p:spPr>
           <a:xfrm>
             <a:off x="0" y="0"/>
-            <a:ext cx="12188952" cy="1005840"/>
+            <a:ext cx="12188952" cy="960120"/>
           </a:xfrm>
           <a:prstGeom prst="rect">
             <a:avLst/>
@@ -4038,8 +4038,8 @@
         </p:nvSpPr>
         <p:spPr>
           <a:xfrm>
-            <a:off x="274320" y="109728"/>
-            <a:ext cx="10058400" cy="731520"/>
+            <a:off x="320040" y="91440"/>
+            <a:ext cx="11430000" cy="594360"/>
           </a:xfrm>
           <a:prstGeom prst="rect">
             <a:avLst/>
@@ -4054,12 +4054,12 @@
           <a:p>
             <a:pPr algn="l"/>
             <a:r>
-              <a:rPr sz="2800" b="1">
+              <a:rPr sz="2600" b="1">
                 <a:solidFill>
                   <a:srgbClr val="FFFFFF"/>
                 </a:solidFill>
               </a:rPr>
-              <a:t>Environment — Gymnasium Pendulum-v1</a:t>
+              <a:t>환경: Gymnasium Pendulum-v1</a:t>
             </a:r>
           </a:p>
         </p:txBody>
@@ -4072,8 +4072,8 @@
         </p:nvSpPr>
         <p:spPr>
           <a:xfrm>
-            <a:off x="274320" y="685800"/>
-            <a:ext cx="10058400" cy="457200"/>
+            <a:off x="320040" y="621792"/>
+            <a:ext cx="11430000" cy="347472"/>
           </a:xfrm>
           <a:prstGeom prst="rect">
             <a:avLst/>
@@ -4088,12 +4088,12 @@
           <a:p>
             <a:pPr algn="l"/>
             <a:r>
-              <a:rPr sz="1400" b="0">
-                <a:solidFill>
-                  <a:srgbClr val="AABBFF"/>
+              <a:rPr sz="1300" b="0">
+                <a:solidFill>
+                  <a:srgbClr val="AACCFF"/>
                 </a:solidFill>
               </a:rPr>
-              <a:t>Classic control benchmark with known physics</a:t>
+              <a:t>알려진 물리 방정식을 가진 고전 제어 벤치마크</a:t>
             </a:r>
           </a:p>
         </p:txBody>
@@ -4106,7 +4106,7 @@
         </p:nvSpPr>
         <p:spPr>
           <a:xfrm>
-            <a:off x="0" y="1005840"/>
+            <a:off x="0" y="960120"/>
             <a:ext cx="12188952" cy="36576"/>
           </a:xfrm>
           <a:prstGeom prst="rect">
@@ -4149,8 +4149,8 @@
         </p:nvSpPr>
         <p:spPr>
           <a:xfrm>
-            <a:off x="365760" y="1188720"/>
-            <a:ext cx="5486400" cy="365760"/>
+            <a:off x="320040" y="1078992"/>
+            <a:ext cx="5669280" cy="365760"/>
           </a:xfrm>
           <a:prstGeom prst="rect">
             <a:avLst/>
@@ -4165,12 +4165,12 @@
           <a:p>
             <a:pPr algn="l"/>
             <a:r>
-              <a:rPr sz="1700" b="1">
+              <a:rPr sz="1500" b="1">
                 <a:solidFill>
                   <a:srgbClr val="1A1A2E"/>
                 </a:solidFill>
               </a:rPr>
-              <a:t>Pendulum Dynamics</a:t>
+              <a:t>단진자 운동 방정식</a:t>
             </a:r>
           </a:p>
         </p:txBody>
@@ -4183,8 +4183,8 @@
         </p:nvSpPr>
         <p:spPr>
           <a:xfrm>
-            <a:off x="365760" y="1645920"/>
-            <a:ext cx="5303520" cy="411480"/>
+            <a:off x="320040" y="1508760"/>
+            <a:ext cx="5486400" cy="457200"/>
           </a:xfrm>
           <a:prstGeom prst="rect">
             <a:avLst/>
@@ -4226,8 +4226,8 @@
         </p:nvSpPr>
         <p:spPr>
           <a:xfrm>
-            <a:off x="502920" y="1673352"/>
-            <a:ext cx="5120640" cy="365760"/>
+            <a:off x="457200" y="1536192"/>
+            <a:ext cx="5303520" cy="402336"/>
           </a:xfrm>
           <a:prstGeom prst="rect">
             <a:avLst/>
@@ -4260,8 +4260,8 @@
         </p:nvSpPr>
         <p:spPr>
           <a:xfrm>
-            <a:off x="365760" y="2148840"/>
-            <a:ext cx="5303520" cy="411480"/>
+            <a:off x="320040" y="2020824"/>
+            <a:ext cx="5486400" cy="457200"/>
           </a:xfrm>
           <a:prstGeom prst="rect">
             <a:avLst/>
@@ -4303,8 +4303,8 @@
         </p:nvSpPr>
         <p:spPr>
           <a:xfrm>
-            <a:off x="502920" y="2176272"/>
-            <a:ext cx="5120640" cy="365760"/>
+            <a:off x="457200" y="2048256"/>
+            <a:ext cx="5303520" cy="402336"/>
           </a:xfrm>
           <a:prstGeom prst="rect">
             <a:avLst/>
@@ -4337,8 +4337,8 @@
         </p:nvSpPr>
         <p:spPr>
           <a:xfrm>
-            <a:off x="365760" y="2651760"/>
-            <a:ext cx="5303520" cy="411480"/>
+            <a:off x="320040" y="2532888"/>
+            <a:ext cx="5486400" cy="457200"/>
           </a:xfrm>
           <a:prstGeom prst="rect">
             <a:avLst/>
@@ -4380,8 +4380,8 @@
         </p:nvSpPr>
         <p:spPr>
           <a:xfrm>
-            <a:off x="502920" y="2679192"/>
-            <a:ext cx="5120640" cy="365760"/>
+            <a:off x="457200" y="2560320"/>
+            <a:ext cx="5303520" cy="402336"/>
           </a:xfrm>
           <a:prstGeom prst="rect">
             <a:avLst/>
@@ -4401,7 +4401,7 @@
                   <a:srgbClr val="1A1A2E"/>
                 </a:solidFill>
               </a:rPr>
-              <a:t>|θ̇| ≤ 8 rad/s  (clipped),  |τ| ≤ 2 N·m</a:t>
+              <a:t>|θ̇| ≤ 8 rad/s (clipped),  |τ| ≤ 2 N·m</a:t>
             </a:r>
           </a:p>
         </p:txBody>
@@ -4414,8 +4414,8 @@
         </p:nvSpPr>
         <p:spPr>
           <a:xfrm>
-            <a:off x="365760" y="3337560"/>
-            <a:ext cx="5486400" cy="365760"/>
+            <a:off x="320040" y="3108960"/>
+            <a:ext cx="5669280" cy="365760"/>
           </a:xfrm>
           <a:prstGeom prst="rect">
             <a:avLst/>
@@ -4430,12 +4430,12 @@
           <a:p>
             <a:pPr algn="l"/>
             <a:r>
-              <a:rPr sz="1700" b="1">
+              <a:rPr sz="1500" b="1">
                 <a:solidFill>
                   <a:srgbClr val="1A1A2E"/>
                 </a:solidFill>
               </a:rPr>
-              <a:t>Integration Comparison</a:t>
+              <a:t>적분 방법 비교</a:t>
             </a:r>
           </a:p>
         </p:txBody>
@@ -4448,8 +4448,8 @@
         </p:nvSpPr>
         <p:spPr>
           <a:xfrm>
-            <a:off x="365760" y="3794760"/>
-            <a:ext cx="1828800" cy="384048"/>
+            <a:off x="320040" y="3547872"/>
+            <a:ext cx="2011680" cy="420624"/>
           </a:xfrm>
           <a:prstGeom prst="rect">
             <a:avLst/>
@@ -4491,8 +4491,8 @@
         </p:nvSpPr>
         <p:spPr>
           <a:xfrm>
-            <a:off x="411480" y="3822191"/>
-            <a:ext cx="1737360" cy="320040"/>
+            <a:off x="374904" y="3593591"/>
+            <a:ext cx="1901952" cy="347472"/>
           </a:xfrm>
           <a:prstGeom prst="rect">
             <a:avLst/>
@@ -4512,7 +4512,7 @@
                   <a:srgbClr val="FFFFFF"/>
                 </a:solidFill>
               </a:rPr>
-              <a:t>Method</a:t>
+              <a:t>방법</a:t>
             </a:r>
           </a:p>
         </p:txBody>
@@ -4525,8 +4525,8 @@
         </p:nvSpPr>
         <p:spPr>
           <a:xfrm>
-            <a:off x="2194560" y="3794760"/>
-            <a:ext cx="1005840" cy="384048"/>
+            <a:off x="2331720" y="3547872"/>
+            <a:ext cx="914400" cy="420624"/>
           </a:xfrm>
           <a:prstGeom prst="rect">
             <a:avLst/>
@@ -4568,8 +4568,8 @@
         </p:nvSpPr>
         <p:spPr>
           <a:xfrm>
-            <a:off x="2240279" y="3822191"/>
-            <a:ext cx="914400" cy="320040"/>
+            <a:off x="2386584" y="3593591"/>
+            <a:ext cx="804672" cy="347472"/>
           </a:xfrm>
           <a:prstGeom prst="rect">
             <a:avLst/>
@@ -4589,7 +4589,7 @@
                   <a:srgbClr val="FFFFFF"/>
                 </a:solidFill>
               </a:rPr>
-              <a:t>Order</a:t>
+              <a:t>차수</a:t>
             </a:r>
           </a:p>
         </p:txBody>
@@ -4602,8 +4602,8 @@
         </p:nvSpPr>
         <p:spPr>
           <a:xfrm>
-            <a:off x="3200400" y="3794760"/>
-            <a:ext cx="1554480" cy="384048"/>
+            <a:off x="3246120" y="3547872"/>
+            <a:ext cx="1645920" cy="420624"/>
           </a:xfrm>
           <a:prstGeom prst="rect">
             <a:avLst/>
@@ -4645,8 +4645,8 @@
         </p:nvSpPr>
         <p:spPr>
           <a:xfrm>
-            <a:off x="3246120" y="3822191"/>
-            <a:ext cx="1463039" cy="320040"/>
+            <a:off x="3300984" y="3593591"/>
+            <a:ext cx="1536192" cy="347472"/>
           </a:xfrm>
           <a:prstGeom prst="rect">
             <a:avLst/>
@@ -4666,7 +4666,7 @@
                   <a:srgbClr val="FFFFFF"/>
                 </a:solidFill>
               </a:rPr>
-              <a:t>dt per step</a:t>
+              <a:t>서브스텝 dt</a:t>
             </a:r>
           </a:p>
         </p:txBody>
@@ -4679,8 +4679,8 @@
         </p:nvSpPr>
         <p:spPr>
           <a:xfrm>
-            <a:off x="4754880" y="3794760"/>
-            <a:ext cx="914400" cy="384048"/>
+            <a:off x="4892040" y="3547872"/>
+            <a:ext cx="914400" cy="420624"/>
           </a:xfrm>
           <a:prstGeom prst="rect">
             <a:avLst/>
@@ -4722,8 +4722,8 @@
         </p:nvSpPr>
         <p:spPr>
           <a:xfrm>
-            <a:off x="4800600" y="3822191"/>
-            <a:ext cx="822960" cy="320040"/>
+            <a:off x="4946904" y="3593591"/>
+            <a:ext cx="804672" cy="347472"/>
           </a:xfrm>
           <a:prstGeom prst="rect">
             <a:avLst/>
@@ -4743,7 +4743,7 @@
                   <a:srgbClr val="FFFFFF"/>
                 </a:solidFill>
               </a:rPr>
-              <a:t>Error</a:t>
+              <a:t>오차 차수</a:t>
             </a:r>
           </a:p>
         </p:txBody>
@@ -4756,8 +4756,8 @@
         </p:nvSpPr>
         <p:spPr>
           <a:xfrm>
-            <a:off x="365760" y="4206240"/>
-            <a:ext cx="1828800" cy="384048"/>
+            <a:off x="320040" y="3968496"/>
+            <a:ext cx="2011680" cy="420624"/>
           </a:xfrm>
           <a:prstGeom prst="rect">
             <a:avLst/>
@@ -4799,8 +4799,8 @@
         </p:nvSpPr>
         <p:spPr>
           <a:xfrm>
-            <a:off x="411480" y="4233672"/>
-            <a:ext cx="1737360" cy="320040"/>
+            <a:off x="374904" y="4014215"/>
+            <a:ext cx="1901952" cy="347472"/>
           </a:xfrm>
           <a:prstGeom prst="rect">
             <a:avLst/>
@@ -4833,8 +4833,8 @@
         </p:nvSpPr>
         <p:spPr>
           <a:xfrm>
-            <a:off x="2194560" y="4206240"/>
-            <a:ext cx="1005840" cy="384048"/>
+            <a:off x="2331720" y="3968496"/>
+            <a:ext cx="914400" cy="420624"/>
           </a:xfrm>
           <a:prstGeom prst="rect">
             <a:avLst/>
@@ -4876,8 +4876,8 @@
         </p:nvSpPr>
         <p:spPr>
           <a:xfrm>
-            <a:off x="2240279" y="4233672"/>
-            <a:ext cx="914400" cy="320040"/>
+            <a:off x="2386584" y="4014215"/>
+            <a:ext cx="804672" cy="347472"/>
           </a:xfrm>
           <a:prstGeom prst="rect">
             <a:avLst/>
@@ -4897,7 +4897,7 @@
                   <a:srgbClr val="1A1A2E"/>
                 </a:solidFill>
               </a:rPr>
-              <a:t>1st</a:t>
+              <a:t>1차</a:t>
             </a:r>
           </a:p>
         </p:txBody>
@@ -4910,8 +4910,8 @@
         </p:nvSpPr>
         <p:spPr>
           <a:xfrm>
-            <a:off x="3200400" y="4206240"/>
-            <a:ext cx="1554480" cy="384048"/>
+            <a:off x="3246120" y="3968496"/>
+            <a:ext cx="1645920" cy="420624"/>
           </a:xfrm>
           <a:prstGeom prst="rect">
             <a:avLst/>
@@ -4953,8 +4953,8 @@
         </p:nvSpPr>
         <p:spPr>
           <a:xfrm>
-            <a:off x="3246120" y="4233672"/>
-            <a:ext cx="1463039" cy="320040"/>
+            <a:off x="3300984" y="4014215"/>
+            <a:ext cx="1536192" cy="347472"/>
           </a:xfrm>
           <a:prstGeom prst="rect">
             <a:avLst/>
@@ -4987,8 +4987,8 @@
         </p:nvSpPr>
         <p:spPr>
           <a:xfrm>
-            <a:off x="4754880" y="4206240"/>
-            <a:ext cx="914400" cy="384048"/>
+            <a:off x="4892040" y="3968496"/>
+            <a:ext cx="914400" cy="420624"/>
           </a:xfrm>
           <a:prstGeom prst="rect">
             <a:avLst/>
@@ -5030,8 +5030,8 @@
         </p:nvSpPr>
         <p:spPr>
           <a:xfrm>
-            <a:off x="4800600" y="4233672"/>
-            <a:ext cx="822960" cy="320040"/>
+            <a:off x="4946904" y="4014215"/>
+            <a:ext cx="804672" cy="347472"/>
           </a:xfrm>
           <a:prstGeom prst="rect">
             <a:avLst/>
@@ -5064,8 +5064,8 @@
         </p:nvSpPr>
         <p:spPr>
           <a:xfrm>
-            <a:off x="365760" y="4617720"/>
-            <a:ext cx="1828800" cy="384048"/>
+            <a:off x="320040" y="4389120"/>
+            <a:ext cx="2011680" cy="420624"/>
           </a:xfrm>
           <a:prstGeom prst="rect">
             <a:avLst/>
@@ -5107,8 +5107,8 @@
         </p:nvSpPr>
         <p:spPr>
           <a:xfrm>
-            <a:off x="411480" y="4645152"/>
-            <a:ext cx="1737360" cy="320040"/>
+            <a:off x="374904" y="4434840"/>
+            <a:ext cx="1901952" cy="347472"/>
           </a:xfrm>
           <a:prstGeom prst="rect">
             <a:avLst/>
@@ -5128,7 +5128,7 @@
                   <a:srgbClr val="1A1A2E"/>
                 </a:solidFill>
               </a:rPr>
-              <a:t>RK4 (ours)</a:t>
+              <a:t>RK4 (기준값)</a:t>
             </a:r>
           </a:p>
         </p:txBody>
@@ -5141,8 +5141,8 @@
         </p:nvSpPr>
         <p:spPr>
           <a:xfrm>
-            <a:off x="2194560" y="4617720"/>
-            <a:ext cx="1005840" cy="384048"/>
+            <a:off x="2331720" y="4389120"/>
+            <a:ext cx="914400" cy="420624"/>
           </a:xfrm>
           <a:prstGeom prst="rect">
             <a:avLst/>
@@ -5184,8 +5184,8 @@
         </p:nvSpPr>
         <p:spPr>
           <a:xfrm>
-            <a:off x="2240279" y="4645152"/>
-            <a:ext cx="914400" cy="320040"/>
+            <a:off x="2386584" y="4434840"/>
+            <a:ext cx="804672" cy="347472"/>
           </a:xfrm>
           <a:prstGeom prst="rect">
             <a:avLst/>
@@ -5205,7 +5205,7 @@
                   <a:srgbClr val="1A1A2E"/>
                 </a:solidFill>
               </a:rPr>
-              <a:t>4th</a:t>
+              <a:t>4차</a:t>
             </a:r>
           </a:p>
         </p:txBody>
@@ -5218,8 +5218,8 @@
         </p:nvSpPr>
         <p:spPr>
           <a:xfrm>
-            <a:off x="3200400" y="4617720"/>
-            <a:ext cx="1554480" cy="384048"/>
+            <a:off x="3246120" y="4389120"/>
+            <a:ext cx="1645920" cy="420624"/>
           </a:xfrm>
           <a:prstGeom prst="rect">
             <a:avLst/>
@@ -5261,8 +5261,8 @@
         </p:nvSpPr>
         <p:spPr>
           <a:xfrm>
-            <a:off x="3246120" y="4645152"/>
-            <a:ext cx="1463039" cy="320040"/>
+            <a:off x="3300984" y="4434840"/>
+            <a:ext cx="1536192" cy="347472"/>
           </a:xfrm>
           <a:prstGeom prst="rect">
             <a:avLst/>
@@ -5295,8 +5295,8 @@
         </p:nvSpPr>
         <p:spPr>
           <a:xfrm>
-            <a:off x="4754880" y="4617720"/>
-            <a:ext cx="914400" cy="384048"/>
+            <a:off x="4892040" y="4389120"/>
+            <a:ext cx="914400" cy="420624"/>
           </a:xfrm>
           <a:prstGeom prst="rect">
             <a:avLst/>
@@ -5338,8 +5338,8 @@
         </p:nvSpPr>
         <p:spPr>
           <a:xfrm>
-            <a:off x="4800600" y="4645152"/>
-            <a:ext cx="822960" cy="320040"/>
+            <a:off x="4946904" y="4434840"/>
+            <a:ext cx="804672" cy="347472"/>
           </a:xfrm>
           <a:prstGeom prst="rect">
             <a:avLst/>
@@ -5364,9 +5364,43 @@
           </a:p>
         </p:txBody>
       </p:sp>
+      <p:sp>
+        <p:nvSpPr>
+          <p:cNvPr id="38" name="TextBox 37"/>
+          <p:cNvSpPr txBox="1"/>
+          <p:nvPr/>
+        </p:nvSpPr>
+        <p:spPr>
+          <a:xfrm>
+            <a:off x="320040" y="4892040"/>
+            <a:ext cx="5669280" cy="365760"/>
+          </a:xfrm>
+          <a:prstGeom prst="rect">
+            <a:avLst/>
+          </a:prstGeom>
+          <a:noFill/>
+        </p:spPr>
+        <p:txBody>
+          <a:bodyPr wrap="square">
+            <a:spAutoFit/>
+          </a:bodyPr>
+          <a:lstStyle/>
+          <a:p>
+            <a:pPr algn="l"/>
+            <a:r>
+              <a:rPr sz="1200" b="0">
+                <a:solidFill>
+                  <a:srgbClr val="555555"/>
+                </a:solidFill>
+              </a:rPr>
+              <a:t>RK4 = 20 서브스텝으로 Euler보다 훨씬 정밀한 기준값 역할</a:t>
+            </a:r>
+          </a:p>
+        </p:txBody>
+      </p:sp>
       <p:pic>
         <p:nvPicPr>
-          <p:cNvPr id="38" name="pendulum_demo.mp4">
+          <p:cNvPr id="39" name="pendulum_demo.mp4">
             <a:hlinkClick r:id="" action="ppaction://media"/>
           </p:cNvPr>
           <p:cNvPicPr>
@@ -5389,8 +5423,8 @@
         </p:blipFill>
         <p:spPr>
           <a:xfrm>
-            <a:off x="6217920" y="1188720"/>
-            <a:ext cx="5577840" cy="5029200"/>
+            <a:off x="6080760" y="1078992"/>
+            <a:ext cx="5806440" cy="4572000"/>
           </a:xfrm>
           <a:prstGeom prst="rect">
             <a:avLst/>
@@ -5399,14 +5433,14 @@
       </p:pic>
       <p:sp>
         <p:nvSpPr>
-          <p:cNvPr id="39" name="TextBox 38"/>
+          <p:cNvPr id="40" name="TextBox 39"/>
           <p:cNvSpPr txBox="1"/>
           <p:nvPr/>
         </p:nvSpPr>
         <p:spPr>
           <a:xfrm>
-            <a:off x="6217920" y="6309360"/>
-            <a:ext cx="5577840" cy="365760"/>
+            <a:off x="6080760" y="5760720"/>
+            <a:ext cx="5806440" cy="411480"/>
           </a:xfrm>
           <a:prstGeom prst="rect">
             <a:avLst/>
@@ -5421,12 +5455,12 @@
           <a:p>
             <a:pPr algn="ctr"/>
             <a:r>
-              <a:rPr sz="1100" b="0">
+              <a:rPr sz="1200" b="0">
                 <a:solidFill>
                   <a:srgbClr val="555555"/>
                 </a:solidFill>
               </a:rPr>
-              <a:t>Energy-based swing-up controller | 12 s demo</a:t>
+              <a:t>에너지 기반 스윙업 컨트롤러 | 12초 데모 (클릭하여 재생)</a:t>
             </a:r>
           </a:p>
         </p:txBody>
@@ -5449,7 +5483,7 @@
                   </p:stCondLst>
                 </p:cTn>
                 <p:tgtEl>
-                  <p:spTgt spid="38"/>
+                  <p:spTgt spid="39"/>
                 </p:tgtEl>
               </p:cMediaNode>
             </p:video>
@@ -5480,7 +5514,7 @@
         <p:spPr>
           <a:xfrm>
             <a:off x="0" y="0"/>
-            <a:ext cx="12188952" cy="1005840"/>
+            <a:ext cx="12188952" cy="960120"/>
           </a:xfrm>
           <a:prstGeom prst="rect">
             <a:avLst/>
@@ -5522,8 +5556,8 @@
         </p:nvSpPr>
         <p:spPr>
           <a:xfrm>
-            <a:off x="274320" y="109728"/>
-            <a:ext cx="10058400" cy="731520"/>
+            <a:off x="320040" y="91440"/>
+            <a:ext cx="11430000" cy="594360"/>
           </a:xfrm>
           <a:prstGeom prst="rect">
             <a:avLst/>
@@ -5538,12 +5572,12 @@
           <a:p>
             <a:pPr algn="l"/>
             <a:r>
-              <a:rPr sz="2800" b="1">
+              <a:rPr sz="2600" b="1">
                 <a:solidFill>
                   <a:srgbClr val="FFFFFF"/>
                 </a:solidFill>
               </a:rPr>
-              <a:t>Dataset Collection</a:t>
+              <a:t>데이터셋 수집</a:t>
             </a:r>
           </a:p>
         </p:txBody>
@@ -5556,8 +5590,8 @@
         </p:nvSpPr>
         <p:spPr>
           <a:xfrm>
-            <a:off x="274320" y="685800"/>
-            <a:ext cx="10058400" cy="457200"/>
+            <a:off x="320040" y="621792"/>
+            <a:ext cx="11430000" cy="347472"/>
           </a:xfrm>
           <a:prstGeom prst="rect">
             <a:avLst/>
@@ -5572,12 +5606,12 @@
           <a:p>
             <a:pPr algn="l"/>
             <a:r>
-              <a:rPr sz="1400" b="0">
-                <a:solidFill>
-                  <a:srgbClr val="AABBFF"/>
+              <a:rPr sz="1300" b="0">
+                <a:solidFill>
+                  <a:srgbClr val="AACCFF"/>
                 </a:solidFill>
               </a:rPr>
-              <a:t>100,000 samples from Pendulum-v1</a:t>
+              <a:t>Pendulum-v1에서 100,000 샘플 수집</a:t>
             </a:r>
           </a:p>
         </p:txBody>
@@ -5590,7 +5624,7 @@
         </p:nvSpPr>
         <p:spPr>
           <a:xfrm>
-            <a:off x="0" y="1005840"/>
+            <a:off x="0" y="960120"/>
             <a:ext cx="12188952" cy="36576"/>
           </a:xfrm>
           <a:prstGeom prst="rect">
@@ -5633,8 +5667,8 @@
         </p:nvSpPr>
         <p:spPr>
           <a:xfrm>
-            <a:off x="365760" y="1143000"/>
-            <a:ext cx="2011680" cy="1188720"/>
+            <a:off x="274320" y="1078992"/>
+            <a:ext cx="2148840" cy="1170432"/>
           </a:xfrm>
           <a:prstGeom prst="rect">
             <a:avLst/>
@@ -5676,8 +5710,8 @@
         </p:nvSpPr>
         <p:spPr>
           <a:xfrm>
-            <a:off x="365760" y="1234440"/>
-            <a:ext cx="2011680" cy="640080"/>
+            <a:off x="274320" y="1143000"/>
+            <a:ext cx="2148840" cy="658368"/>
           </a:xfrm>
           <a:prstGeom prst="rect">
             <a:avLst/>
@@ -5710,8 +5744,8 @@
         </p:nvSpPr>
         <p:spPr>
           <a:xfrm>
-            <a:off x="365760" y="1783080"/>
-            <a:ext cx="2011680" cy="365760"/>
+            <a:off x="274320" y="1737360"/>
+            <a:ext cx="2148840" cy="384048"/>
           </a:xfrm>
           <a:prstGeom prst="rect">
             <a:avLst/>
@@ -5731,7 +5765,7 @@
                   <a:srgbClr val="F0F0F0"/>
                 </a:solidFill>
               </a:rPr>
-              <a:t>Total samples</a:t>
+              <a:t>총 샘플 수</a:t>
             </a:r>
           </a:p>
         </p:txBody>
@@ -5744,8 +5778,8 @@
         </p:nvSpPr>
         <p:spPr>
           <a:xfrm>
-            <a:off x="2514600" y="1143000"/>
-            <a:ext cx="2011680" cy="1188720"/>
+            <a:off x="2532888" y="1078992"/>
+            <a:ext cx="2148840" cy="1170432"/>
           </a:xfrm>
           <a:prstGeom prst="rect">
             <a:avLst/>
@@ -5787,8 +5821,8 @@
         </p:nvSpPr>
         <p:spPr>
           <a:xfrm>
-            <a:off x="2514600" y="1234440"/>
-            <a:ext cx="2011680" cy="640080"/>
+            <a:off x="2532888" y="1143000"/>
+            <a:ext cx="2148840" cy="658368"/>
           </a:xfrm>
           <a:prstGeom prst="rect">
             <a:avLst/>
@@ -5821,8 +5855,8 @@
         </p:nvSpPr>
         <p:spPr>
           <a:xfrm>
-            <a:off x="2514600" y="1783080"/>
-            <a:ext cx="2011680" cy="365760"/>
+            <a:off x="2532888" y="1737360"/>
+            <a:ext cx="2148840" cy="384048"/>
           </a:xfrm>
           <a:prstGeom prst="rect">
             <a:avLst/>
@@ -5842,7 +5876,7 @@
                   <a:srgbClr val="F0F0F0"/>
                 </a:solidFill>
               </a:rPr>
-              <a:t>Episodes</a:t>
+              <a:t>에피소드</a:t>
             </a:r>
           </a:p>
         </p:txBody>
@@ -5855,8 +5889,8 @@
         </p:nvSpPr>
         <p:spPr>
           <a:xfrm>
-            <a:off x="4663440" y="1143000"/>
-            <a:ext cx="2011680" cy="1188720"/>
+            <a:off x="4791456" y="1078992"/>
+            <a:ext cx="2148840" cy="1170432"/>
           </a:xfrm>
           <a:prstGeom prst="rect">
             <a:avLst/>
@@ -5898,8 +5932,8 @@
         </p:nvSpPr>
         <p:spPr>
           <a:xfrm>
-            <a:off x="4663440" y="1234440"/>
-            <a:ext cx="2011680" cy="640080"/>
+            <a:off x="4791456" y="1143000"/>
+            <a:ext cx="2148840" cy="658368"/>
           </a:xfrm>
           <a:prstGeom prst="rect">
             <a:avLst/>
@@ -5932,8 +5966,8 @@
         </p:nvSpPr>
         <p:spPr>
           <a:xfrm>
-            <a:off x="4663440" y="1783080"/>
-            <a:ext cx="2011680" cy="365760"/>
+            <a:off x="4791456" y="1737360"/>
+            <a:ext cx="2148840" cy="384048"/>
           </a:xfrm>
           <a:prstGeom prst="rect">
             <a:avLst/>
@@ -5953,7 +5987,7 @@
                   <a:srgbClr val="F0F0F0"/>
                 </a:solidFill>
               </a:rPr>
-              <a:t>Steps / episode</a:t>
+              <a:t>스텝/에피소드</a:t>
             </a:r>
           </a:p>
         </p:txBody>
@@ -5966,8 +6000,8 @@
         </p:nvSpPr>
         <p:spPr>
           <a:xfrm>
-            <a:off x="6812280" y="1143000"/>
-            <a:ext cx="2011680" cy="1188720"/>
+            <a:off x="7050024" y="1078992"/>
+            <a:ext cx="2148840" cy="1170432"/>
           </a:xfrm>
           <a:prstGeom prst="rect">
             <a:avLst/>
@@ -6009,8 +6043,8 @@
         </p:nvSpPr>
         <p:spPr>
           <a:xfrm>
-            <a:off x="6812280" y="1234440"/>
-            <a:ext cx="2011680" cy="640080"/>
+            <a:off x="7050024" y="1143000"/>
+            <a:ext cx="2148840" cy="658368"/>
           </a:xfrm>
           <a:prstGeom prst="rect">
             <a:avLst/>
@@ -6043,8 +6077,8 @@
         </p:nvSpPr>
         <p:spPr>
           <a:xfrm>
-            <a:off x="6812280" y="1783080"/>
-            <a:ext cx="2011680" cy="365760"/>
+            <a:off x="7050024" y="1737360"/>
+            <a:ext cx="2148840" cy="384048"/>
           </a:xfrm>
           <a:prstGeom prst="rect">
             <a:avLst/>
@@ -6064,7 +6098,7 @@
                   <a:srgbClr val="F0F0F0"/>
                 </a:solidFill>
               </a:rPr>
-              <a:t>Input features</a:t>
+              <a:t>입력 특성</a:t>
             </a:r>
           </a:p>
         </p:txBody>
@@ -6077,8 +6111,8 @@
         </p:nvSpPr>
         <p:spPr>
           <a:xfrm>
-            <a:off x="8961120" y="1143000"/>
-            <a:ext cx="2011680" cy="1188720"/>
+            <a:off x="9308592" y="1078992"/>
+            <a:ext cx="2148840" cy="1170432"/>
           </a:xfrm>
           <a:prstGeom prst="rect">
             <a:avLst/>
@@ -6120,8 +6154,8 @@
         </p:nvSpPr>
         <p:spPr>
           <a:xfrm>
-            <a:off x="8961120" y="1234440"/>
-            <a:ext cx="2011680" cy="640080"/>
+            <a:off x="9308592" y="1143000"/>
+            <a:ext cx="2148840" cy="658368"/>
           </a:xfrm>
           <a:prstGeom prst="rect">
             <a:avLst/>
@@ -6154,8 +6188,8 @@
         </p:nvSpPr>
         <p:spPr>
           <a:xfrm>
-            <a:off x="8961120" y="1783080"/>
-            <a:ext cx="2011680" cy="365760"/>
+            <a:off x="9308592" y="1737360"/>
+            <a:ext cx="2148840" cy="384048"/>
           </a:xfrm>
           <a:prstGeom prst="rect">
             <a:avLst/>
@@ -6175,7 +6209,7 @@
                   <a:srgbClr val="F0F0F0"/>
                 </a:solidFill>
               </a:rPr>
-              <a:t>Target variables</a:t>
+              <a:t>출력 목표</a:t>
             </a:r>
           </a:p>
         </p:txBody>
@@ -6188,7 +6222,7 @@
         </p:nvSpPr>
         <p:spPr>
           <a:xfrm>
-            <a:off x="365760" y="2606040"/>
+            <a:off x="320040" y="2423160"/>
             <a:ext cx="5486400" cy="365760"/>
           </a:xfrm>
           <a:prstGeom prst="rect">
@@ -6204,12 +6238,12 @@
           <a:p>
             <a:pPr algn="l"/>
             <a:r>
-              <a:rPr sz="1700" b="1">
+              <a:rPr sz="1600" b="1">
                 <a:solidFill>
                   <a:srgbClr val="1A1A2E"/>
                 </a:solidFill>
               </a:rPr>
-              <a:t>Features (X)</a:t>
+              <a:t>입력 특성 (X)</a:t>
             </a:r>
           </a:p>
         </p:txBody>
@@ -6222,7 +6256,7 @@
         </p:nvSpPr>
         <p:spPr>
           <a:xfrm>
-            <a:off x="365760" y="3017520"/>
+            <a:off x="320040" y="2852928"/>
             <a:ext cx="109728" cy="347472"/>
           </a:xfrm>
           <a:prstGeom prst="rect">
@@ -6265,8 +6299,8 @@
         </p:nvSpPr>
         <p:spPr>
           <a:xfrm>
-            <a:off x="594360" y="3017520"/>
-            <a:ext cx="5303520" cy="384048"/>
+            <a:off x="502920" y="2852928"/>
+            <a:ext cx="5349240" cy="402336"/>
           </a:xfrm>
           <a:prstGeom prst="rect">
             <a:avLst/>
@@ -6286,7 +6320,7 @@
                   <a:srgbClr val="1A1A2E"/>
                 </a:solidFill>
               </a:rPr>
-              <a:t>cos(θ)    Cosine of pendulum angle</a:t>
+              <a:t>cos(θ)    진자 각도의 코사인</a:t>
             </a:r>
           </a:p>
         </p:txBody>
@@ -6299,7 +6333,7 @@
         </p:nvSpPr>
         <p:spPr>
           <a:xfrm>
-            <a:off x="365760" y="3493008"/>
+            <a:off x="320040" y="3328416"/>
             <a:ext cx="109728" cy="347472"/>
           </a:xfrm>
           <a:prstGeom prst="rect">
@@ -6342,8 +6376,8 @@
         </p:nvSpPr>
         <p:spPr>
           <a:xfrm>
-            <a:off x="594360" y="3493008"/>
-            <a:ext cx="5303520" cy="384048"/>
+            <a:off x="502920" y="3328416"/>
+            <a:ext cx="5349240" cy="402336"/>
           </a:xfrm>
           <a:prstGeom prst="rect">
             <a:avLst/>
@@ -6363,7 +6397,7 @@
                   <a:srgbClr val="1A1A2E"/>
                 </a:solidFill>
               </a:rPr>
-              <a:t>sin(θ)    Sine of pendulum angle</a:t>
+              <a:t>sin(θ)    진자 각도의 사인</a:t>
             </a:r>
           </a:p>
         </p:txBody>
@@ -6376,7 +6410,7 @@
         </p:nvSpPr>
         <p:spPr>
           <a:xfrm>
-            <a:off x="365760" y="3968496"/>
+            <a:off x="320040" y="3803904"/>
             <a:ext cx="109728" cy="347472"/>
           </a:xfrm>
           <a:prstGeom prst="rect">
@@ -6419,8 +6453,8 @@
         </p:nvSpPr>
         <p:spPr>
           <a:xfrm>
-            <a:off x="594360" y="3968496"/>
-            <a:ext cx="5303520" cy="384048"/>
+            <a:off x="502920" y="3803904"/>
+            <a:ext cx="5349240" cy="402336"/>
           </a:xfrm>
           <a:prstGeom prst="rect">
             <a:avLst/>
@@ -6440,7 +6474,7 @@
                   <a:srgbClr val="1A1A2E"/>
                 </a:solidFill>
               </a:rPr>
-              <a:t>θ̇           Angular velocity (rad/s)</a:t>
+              <a:t>θ̇        각속도 (rad/s)</a:t>
             </a:r>
           </a:p>
         </p:txBody>
@@ -6453,7 +6487,7 @@
         </p:nvSpPr>
         <p:spPr>
           <a:xfrm>
-            <a:off x="365760" y="4443983"/>
+            <a:off x="320040" y="4279392"/>
             <a:ext cx="109728" cy="347472"/>
           </a:xfrm>
           <a:prstGeom prst="rect">
@@ -6496,8 +6530,8 @@
         </p:nvSpPr>
         <p:spPr>
           <a:xfrm>
-            <a:off x="594360" y="4443983"/>
-            <a:ext cx="5303520" cy="384048"/>
+            <a:off x="502920" y="4279392"/>
+            <a:ext cx="5349240" cy="402336"/>
           </a:xfrm>
           <a:prstGeom prst="rect">
             <a:avLst/>
@@ -6517,7 +6551,7 @@
                   <a:srgbClr val="1A1A2E"/>
                 </a:solidFill>
               </a:rPr>
-              <a:t>τ           Applied torque (N·m)</a:t>
+              <a:t>τ         적용 토크 (N·m)</a:t>
             </a:r>
           </a:p>
         </p:txBody>
@@ -6530,8 +6564,8 @@
         </p:nvSpPr>
         <p:spPr>
           <a:xfrm>
-            <a:off x="6217920" y="2606040"/>
-            <a:ext cx="5486400" cy="365760"/>
+            <a:off x="6263640" y="2423160"/>
+            <a:ext cx="5577840" cy="365760"/>
           </a:xfrm>
           <a:prstGeom prst="rect">
             <a:avLst/>
@@ -6546,12 +6580,12 @@
           <a:p>
             <a:pPr algn="l"/>
             <a:r>
-              <a:rPr sz="1700" b="1">
+              <a:rPr sz="1600" b="1">
                 <a:solidFill>
                   <a:srgbClr val="1A1A2E"/>
                 </a:solidFill>
               </a:rPr>
-              <a:t>Targets (y)</a:t>
+              <a:t>출력 목표 (y)</a:t>
             </a:r>
           </a:p>
         </p:txBody>
@@ -6564,8 +6598,8 @@
         </p:nvSpPr>
         <p:spPr>
           <a:xfrm>
-            <a:off x="6217920" y="3017520"/>
-            <a:ext cx="5577840" cy="457200"/>
+            <a:off x="6263640" y="2852928"/>
+            <a:ext cx="5577840" cy="502920"/>
           </a:xfrm>
           <a:prstGeom prst="rect">
             <a:avLst/>
@@ -6607,8 +6641,8 @@
         </p:nvSpPr>
         <p:spPr>
           <a:xfrm>
-            <a:off x="6355080" y="3063240"/>
-            <a:ext cx="5394960" cy="365760"/>
+            <a:off x="6446520" y="2889504"/>
+            <a:ext cx="2103120" cy="402336"/>
           </a:xfrm>
           <a:prstGeom prst="rect">
             <a:avLst/>
@@ -6623,26 +6657,60 @@
           <a:p>
             <a:pPr algn="l"/>
             <a:r>
-              <a:rPr sz="1400" b="0">
+              <a:rPr sz="1400" b="1">
+                <a:solidFill>
+                  <a:srgbClr val="0F3C96"/>
+                </a:solidFill>
+              </a:rPr>
+              <a:t>err_theta</a:t>
+            </a:r>
+          </a:p>
+        </p:txBody>
+      </p:sp>
+      <p:sp>
+        <p:nvSpPr>
+          <p:cNvPr id="33" name="TextBox 32"/>
+          <p:cNvSpPr txBox="1"/>
+          <p:nvPr/>
+        </p:nvSpPr>
+        <p:spPr>
+          <a:xfrm>
+            <a:off x="8549640" y="2889504"/>
+            <a:ext cx="3246120" cy="402336"/>
+          </a:xfrm>
+          <a:prstGeom prst="rect">
+            <a:avLst/>
+          </a:prstGeom>
+          <a:noFill/>
+        </p:spPr>
+        <p:txBody>
+          <a:bodyPr wrap="square">
+            <a:spAutoFit/>
+          </a:bodyPr>
+          <a:lstStyle/>
+          <a:p>
+            <a:pPr algn="l"/>
+            <a:r>
+              <a:rPr sz="1300" b="0">
                 <a:solidFill>
                   <a:srgbClr val="1A1A2E"/>
                 </a:solidFill>
               </a:rPr>
-              <a:t>err_theta  —  Angle error: Euler − RK4 (rad)</a:t>
-            </a:r>
-          </a:p>
-        </p:txBody>
-      </p:sp>
-      <p:sp>
-        <p:nvSpPr>
-          <p:cNvPr id="33" name="Rectangle 32"/>
+              <a:t>각도 오차: Euler − RK4 (rad)</a:t>
+            </a:r>
+          </a:p>
+        </p:txBody>
+      </p:sp>
+      <p:sp>
+        <p:nvSpPr>
+          <p:cNvPr id="34" name="Rectangle 33"/>
           <p:cNvSpPr/>
           <p:nvPr/>
         </p:nvSpPr>
         <p:spPr>
           <a:xfrm>
-            <a:off x="6217920" y="3520439"/>
-            <a:ext cx="5577840" cy="457200"/>
+            <a:off x="6263640" y="3419856"/>
+            <a:ext cx="5577840" cy="502920"/>
           </a:xfrm>
           <a:prstGeom prst="rect">
             <a:avLst/>
@@ -6678,14 +6746,14 @@
       </p:sp>
       <p:sp>
         <p:nvSpPr>
-          <p:cNvPr id="34" name="TextBox 33"/>
+          <p:cNvPr id="35" name="TextBox 34"/>
           <p:cNvSpPr txBox="1"/>
           <p:nvPr/>
         </p:nvSpPr>
         <p:spPr>
           <a:xfrm>
-            <a:off x="6355080" y="3566160"/>
-            <a:ext cx="5394960" cy="365760"/>
+            <a:off x="6446520" y="3456432"/>
+            <a:ext cx="2103120" cy="402336"/>
           </a:xfrm>
           <a:prstGeom prst="rect">
             <a:avLst/>
@@ -6700,26 +6768,26 @@
           <a:p>
             <a:pPr algn="l"/>
             <a:r>
-              <a:rPr sz="1400" b="0">
-                <a:solidFill>
-                  <a:srgbClr val="1A1A2E"/>
+              <a:rPr sz="1400" b="1">
+                <a:solidFill>
+                  <a:srgbClr val="0F3C96"/>
                 </a:solidFill>
               </a:rPr>
-              <a:t>err_theta_dot  —  Velocity error: Euler − RK4 (rad/s)</a:t>
-            </a:r>
-          </a:p>
-        </p:txBody>
-      </p:sp>
-      <p:sp>
-        <p:nvSpPr>
-          <p:cNvPr id="35" name="TextBox 34"/>
+              <a:t>err_theta_dot</a:t>
+            </a:r>
+          </a:p>
+        </p:txBody>
+      </p:sp>
+      <p:sp>
+        <p:nvSpPr>
+          <p:cNvPr id="36" name="TextBox 35"/>
           <p:cNvSpPr txBox="1"/>
           <p:nvPr/>
         </p:nvSpPr>
         <p:spPr>
           <a:xfrm>
-            <a:off x="365760" y="5943600"/>
-            <a:ext cx="11430000" cy="457200"/>
+            <a:off x="8549640" y="3456432"/>
+            <a:ext cx="3246120" cy="402336"/>
           </a:xfrm>
           <a:prstGeom prst="rect">
             <a:avLst/>
@@ -6732,6 +6800,40 @@
           </a:bodyPr>
           <a:lstStyle/>
           <a:p>
+            <a:pPr algn="l"/>
+            <a:r>
+              <a:rPr sz="1300" b="0">
+                <a:solidFill>
+                  <a:srgbClr val="1A1A2E"/>
+                </a:solidFill>
+              </a:rPr>
+              <a:t>각속도 오차: Euler − RK4 (rad/s)</a:t>
+            </a:r>
+          </a:p>
+        </p:txBody>
+      </p:sp>
+      <p:sp>
+        <p:nvSpPr>
+          <p:cNvPr id="37" name="TextBox 36"/>
+          <p:cNvSpPr txBox="1"/>
+          <p:nvPr/>
+        </p:nvSpPr>
+        <p:spPr>
+          <a:xfrm>
+            <a:off x="320040" y="5870448"/>
+            <a:ext cx="11521440" cy="411480"/>
+          </a:xfrm>
+          <a:prstGeom prst="rect">
+            <a:avLst/>
+          </a:prstGeom>
+          <a:noFill/>
+        </p:spPr>
+        <p:txBody>
+          <a:bodyPr wrap="square">
+            <a:spAutoFit/>
+          </a:bodyPr>
+          <a:lstStyle/>
+          <a:p>
             <a:pPr algn="ctr"/>
             <a:r>
               <a:rPr sz="1400" b="0">
@@ -6739,7 +6841,7 @@
                   <a:srgbClr val="555555"/>
                 </a:solidFill>
               </a:rPr>
-              <a:t>Train 70%  |  Validation 15%  |  Test 15%      (random split, seed=42)</a:t>
+              <a:t>학습 70%  |  검증 15%  |  테스트 15%   (랜덤 분할, seed=42)</a:t>
             </a:r>
           </a:p>
         </p:txBody>
@@ -6771,7 +6873,7 @@
         <p:spPr>
           <a:xfrm>
             <a:off x="0" y="0"/>
-            <a:ext cx="12188952" cy="1005840"/>
+            <a:ext cx="12188952" cy="960120"/>
           </a:xfrm>
           <a:prstGeom prst="rect">
             <a:avLst/>
@@ -6813,8 +6915,8 @@
         </p:nvSpPr>
         <p:spPr>
           <a:xfrm>
-            <a:off x="274320" y="109728"/>
-            <a:ext cx="10058400" cy="731520"/>
+            <a:off x="320040" y="91440"/>
+            <a:ext cx="11430000" cy="594360"/>
           </a:xfrm>
           <a:prstGeom prst="rect">
             <a:avLst/>
@@ -6829,12 +6931,12 @@
           <a:p>
             <a:pPr algn="l"/>
             <a:r>
-              <a:rPr sz="2800" b="1">
+              <a:rPr sz="2600" b="1">
                 <a:solidFill>
                   <a:srgbClr val="FFFFFF"/>
                 </a:solidFill>
               </a:rPr>
-              <a:t>Models</a:t>
+              <a:t>모델 구조</a:t>
             </a:r>
           </a:p>
         </p:txBody>
@@ -6847,8 +6949,8 @@
         </p:nvSpPr>
         <p:spPr>
           <a:xfrm>
-            <a:off x="274320" y="685800"/>
-            <a:ext cx="10058400" cy="457200"/>
+            <a:off x="320040" y="621792"/>
+            <a:ext cx="11430000" cy="347472"/>
           </a:xfrm>
           <a:prstGeom prst="rect">
             <a:avLst/>
@@ -6863,12 +6965,12 @@
           <a:p>
             <a:pPr algn="l"/>
             <a:r>
-              <a:rPr sz="1400" b="0">
-                <a:solidFill>
-                  <a:srgbClr val="AABBFF"/>
+              <a:rPr sz="1300" b="0">
+                <a:solidFill>
+                  <a:srgbClr val="AACCFF"/>
                 </a:solidFill>
               </a:rPr>
-              <a:t>Baseline + MLP</a:t>
+              <a:t>베이스라인 vs MLP</a:t>
             </a:r>
           </a:p>
         </p:txBody>
@@ -6881,7 +6983,7 @@
         </p:nvSpPr>
         <p:spPr>
           <a:xfrm>
-            <a:off x="0" y="1005840"/>
+            <a:off x="0" y="960120"/>
             <a:ext cx="12188952" cy="36576"/>
           </a:xfrm>
           <a:prstGeom prst="rect">
@@ -6924,8 +7026,8 @@
         </p:nvSpPr>
         <p:spPr>
           <a:xfrm>
-            <a:off x="365760" y="1143000"/>
-            <a:ext cx="5394960" cy="502920"/>
+            <a:off x="320040" y="1078992"/>
+            <a:ext cx="5440680" cy="475488"/>
           </a:xfrm>
           <a:prstGeom prst="rect">
             <a:avLst/>
@@ -6967,8 +7069,8 @@
         </p:nvSpPr>
         <p:spPr>
           <a:xfrm>
-            <a:off x="457200" y="1188720"/>
-            <a:ext cx="5212080" cy="411480"/>
+            <a:off x="457200" y="1115568"/>
+            <a:ext cx="5166360" cy="402336"/>
           </a:xfrm>
           <a:prstGeom prst="rect">
             <a:avLst/>
@@ -6983,12 +7085,12 @@
           <a:p>
             <a:pPr algn="l"/>
             <a:r>
-              <a:rPr sz="1700" b="1">
+              <a:rPr sz="1600" b="1">
                 <a:solidFill>
                   <a:srgbClr val="FFFFFF"/>
                 </a:solidFill>
               </a:rPr>
-              <a:t>Linear Regression  (Baseline)</a:t>
+              <a:t>Linear Regression (베이스라인)</a:t>
             </a:r>
           </a:p>
         </p:txBody>
@@ -7001,8 +7103,8 @@
         </p:nvSpPr>
         <p:spPr>
           <a:xfrm>
-            <a:off x="365760" y="1737360"/>
-            <a:ext cx="109728" cy="347472"/>
+            <a:off x="320040" y="1627632"/>
+            <a:ext cx="109728" cy="329184"/>
           </a:xfrm>
           <a:prstGeom prst="rect">
             <a:avLst/>
@@ -7044,8 +7146,8 @@
         </p:nvSpPr>
         <p:spPr>
           <a:xfrm>
-            <a:off x="594360" y="1737360"/>
-            <a:ext cx="5120640" cy="384048"/>
+            <a:off x="502920" y="1627632"/>
+            <a:ext cx="5212080" cy="402336"/>
           </a:xfrm>
           <a:prstGeom prst="rect">
             <a:avLst/>
@@ -7078,8 +7180,8 @@
         </p:nvSpPr>
         <p:spPr>
           <a:xfrm>
-            <a:off x="365760" y="2212848"/>
-            <a:ext cx="109728" cy="347472"/>
+            <a:off x="320040" y="2084832"/>
+            <a:ext cx="109728" cy="329184"/>
           </a:xfrm>
           <a:prstGeom prst="rect">
             <a:avLst/>
@@ -7121,8 +7223,8 @@
         </p:nvSpPr>
         <p:spPr>
           <a:xfrm>
-            <a:off x="594360" y="2212848"/>
-            <a:ext cx="5120640" cy="384048"/>
+            <a:off x="502920" y="2084832"/>
+            <a:ext cx="5212080" cy="402336"/>
           </a:xfrm>
           <a:prstGeom prst="rect">
             <a:avLst/>
@@ -7142,7 +7244,7 @@
                   <a:srgbClr val="1A1A2E"/>
                 </a:solidFill>
               </a:rPr>
-              <a:t>One independent regressor per target</a:t>
+              <a:t>목표 변수별 독립적인 회귀 모델 적용</a:t>
             </a:r>
           </a:p>
         </p:txBody>
@@ -7155,8 +7257,8 @@
         </p:nvSpPr>
         <p:spPr>
           <a:xfrm>
-            <a:off x="365760" y="2688336"/>
-            <a:ext cx="109728" cy="347472"/>
+            <a:off x="320040" y="2542032"/>
+            <a:ext cx="109728" cy="329184"/>
           </a:xfrm>
           <a:prstGeom prst="rect">
             <a:avLst/>
@@ -7198,8 +7300,8 @@
         </p:nvSpPr>
         <p:spPr>
           <a:xfrm>
-            <a:off x="594360" y="2688336"/>
-            <a:ext cx="5120640" cy="384048"/>
+            <a:off x="502920" y="2542032"/>
+            <a:ext cx="5212080" cy="402336"/>
           </a:xfrm>
           <a:prstGeom prst="rect">
             <a:avLst/>
@@ -7219,7 +7321,7 @@
                   <a:srgbClr val="1A1A2E"/>
                 </a:solidFill>
               </a:rPr>
-              <a:t>Assumes linear relationship: y = Xw</a:t>
+              <a:t>목적함수: min ||Xw - y||</a:t>
             </a:r>
           </a:p>
         </p:txBody>
@@ -7232,8 +7334,8 @@
         </p:nvSpPr>
         <p:spPr>
           <a:xfrm>
-            <a:off x="365760" y="3163824"/>
-            <a:ext cx="109728" cy="347472"/>
+            <a:off x="320040" y="2999232"/>
+            <a:ext cx="109728" cy="329184"/>
           </a:xfrm>
           <a:prstGeom prst="rect">
             <a:avLst/>
@@ -7275,8 +7377,8 @@
         </p:nvSpPr>
         <p:spPr>
           <a:xfrm>
-            <a:off x="594360" y="3163824"/>
-            <a:ext cx="5120640" cy="384048"/>
+            <a:off x="502920" y="2999232"/>
+            <a:ext cx="5212080" cy="402336"/>
           </a:xfrm>
           <a:prstGeom prst="rect">
             <a:avLst/>
@@ -7296,7 +7398,7 @@
                   <a:srgbClr val="1A1A2E"/>
                 </a:solidFill>
               </a:rPr>
-              <a:t>Fails where error is nonlinear in sin(θ)</a:t>
+              <a:t>sin(θ)에 대한 비선형 의존성 학습 불가</a:t>
             </a:r>
           </a:p>
         </p:txBody>
@@ -7309,8 +7411,8 @@
         </p:nvSpPr>
         <p:spPr>
           <a:xfrm>
-            <a:off x="6400800" y="1143000"/>
-            <a:ext cx="5394960" cy="502920"/>
+            <a:off x="6446520" y="1078992"/>
+            <a:ext cx="5440680" cy="475488"/>
           </a:xfrm>
           <a:prstGeom prst="rect">
             <a:avLst/>
@@ -7352,8 +7454,8 @@
         </p:nvSpPr>
         <p:spPr>
           <a:xfrm>
-            <a:off x="6492240" y="1188720"/>
-            <a:ext cx="5212080" cy="411480"/>
+            <a:off x="6583680" y="1115568"/>
+            <a:ext cx="5166360" cy="402336"/>
           </a:xfrm>
           <a:prstGeom prst="rect">
             <a:avLst/>
@@ -7368,12 +7470,12 @@
           <a:p>
             <a:pPr algn="l"/>
             <a:r>
-              <a:rPr sz="1700" b="1">
+              <a:rPr sz="1600" b="1">
                 <a:solidFill>
                   <a:srgbClr val="FFFFFF"/>
                 </a:solidFill>
               </a:rPr>
-              <a:t>MLP  (Main Model)</a:t>
+              <a:t>MLP (주요 모델)</a:t>
             </a:r>
           </a:p>
         </p:txBody>
@@ -7386,8 +7488,8 @@
         </p:nvSpPr>
         <p:spPr>
           <a:xfrm>
-            <a:off x="6400800" y="1737360"/>
-            <a:ext cx="109728" cy="347472"/>
+            <a:off x="6446520" y="1627632"/>
+            <a:ext cx="109728" cy="329184"/>
           </a:xfrm>
           <a:prstGeom prst="rect">
             <a:avLst/>
@@ -7429,8 +7531,8 @@
         </p:nvSpPr>
         <p:spPr>
           <a:xfrm>
-            <a:off x="6629400" y="1737360"/>
-            <a:ext cx="5120640" cy="384048"/>
+            <a:off x="6629400" y="1627632"/>
+            <a:ext cx="5212080" cy="402336"/>
           </a:xfrm>
           <a:prstGeom prst="rect">
             <a:avLst/>
@@ -7463,8 +7565,8 @@
         </p:nvSpPr>
         <p:spPr>
           <a:xfrm>
-            <a:off x="6400800" y="2212848"/>
-            <a:ext cx="109728" cy="347472"/>
+            <a:off x="6446520" y="2084832"/>
+            <a:ext cx="109728" cy="329184"/>
           </a:xfrm>
           <a:prstGeom prst="rect">
             <a:avLst/>
@@ -7506,8 +7608,8 @@
         </p:nvSpPr>
         <p:spPr>
           <a:xfrm>
-            <a:off x="6629400" y="2212848"/>
-            <a:ext cx="5120640" cy="384048"/>
+            <a:off x="6629400" y="2084832"/>
+            <a:ext cx="5212080" cy="402336"/>
           </a:xfrm>
           <a:prstGeom prst="rect">
             <a:avLst/>
@@ -7540,8 +7642,8 @@
         </p:nvSpPr>
         <p:spPr>
           <a:xfrm>
-            <a:off x="6400800" y="2688336"/>
-            <a:ext cx="109728" cy="347472"/>
+            <a:off x="6446520" y="2542032"/>
+            <a:ext cx="109728" cy="329184"/>
           </a:xfrm>
           <a:prstGeom prst="rect">
             <a:avLst/>
@@ -7583,8 +7685,8 @@
         </p:nvSpPr>
         <p:spPr>
           <a:xfrm>
-            <a:off x="6629400" y="2688336"/>
-            <a:ext cx="5120640" cy="384048"/>
+            <a:off x="6629400" y="2542032"/>
+            <a:ext cx="5212080" cy="402336"/>
           </a:xfrm>
           <a:prstGeom prst="rect">
             <a:avLst/>
@@ -7617,8 +7719,8 @@
         </p:nvSpPr>
         <p:spPr>
           <a:xfrm>
-            <a:off x="6400800" y="3163824"/>
-            <a:ext cx="109728" cy="347472"/>
+            <a:off x="6446520" y="2999232"/>
+            <a:ext cx="109728" cy="329184"/>
           </a:xfrm>
           <a:prstGeom prst="rect">
             <a:avLst/>
@@ -7660,8 +7762,8 @@
         </p:nvSpPr>
         <p:spPr>
           <a:xfrm>
-            <a:off x="6629400" y="3163824"/>
-            <a:ext cx="5120640" cy="384048"/>
+            <a:off x="6629400" y="2999232"/>
+            <a:ext cx="5212080" cy="402336"/>
           </a:xfrm>
           <a:prstGeom prst="rect">
             <a:avLst/>
@@ -7681,7 +7783,7 @@
                   <a:srgbClr val="1A1A2E"/>
                 </a:solidFill>
               </a:rPr>
-              <a:t>→ Linear(2)   [output]</a:t>
+              <a:t>→ Linear(2)  [출력층]</a:t>
             </a:r>
           </a:p>
         </p:txBody>
@@ -7694,8 +7796,8 @@
         </p:nvSpPr>
         <p:spPr>
           <a:xfrm>
-            <a:off x="6400800" y="3639312"/>
-            <a:ext cx="109728" cy="347472"/>
+            <a:off x="6446520" y="3456432"/>
+            <a:ext cx="109728" cy="329184"/>
           </a:xfrm>
           <a:prstGeom prst="rect">
             <a:avLst/>
@@ -7737,8 +7839,8 @@
         </p:nvSpPr>
         <p:spPr>
           <a:xfrm>
-            <a:off x="6629400" y="3639312"/>
-            <a:ext cx="5120640" cy="384048"/>
+            <a:off x="6629400" y="3456432"/>
+            <a:ext cx="5212080" cy="402336"/>
           </a:xfrm>
           <a:prstGeom prst="rect">
             <a:avLst/>
@@ -7758,7 +7860,7 @@
                   <a:srgbClr val="1A1A2E"/>
                 </a:solidFill>
               </a:rPr>
-              <a:t>Loss: MSELoss   |   Optimizer: Adam (lr=1e-3)</a:t>
+              <a:t>손실함수: MSELoss  |  최적화: Adam (lr=1e-3)</a:t>
             </a:r>
           </a:p>
         </p:txBody>
@@ -7771,8 +7873,8 @@
         </p:nvSpPr>
         <p:spPr>
           <a:xfrm>
-            <a:off x="6400800" y="4114800"/>
-            <a:ext cx="109728" cy="347472"/>
+            <a:off x="6446520" y="3913632"/>
+            <a:ext cx="109728" cy="329184"/>
           </a:xfrm>
           <a:prstGeom prst="rect">
             <a:avLst/>
@@ -7814,8 +7916,8 @@
         </p:nvSpPr>
         <p:spPr>
           <a:xfrm>
-            <a:off x="6629400" y="4114800"/>
-            <a:ext cx="5120640" cy="384048"/>
+            <a:off x="6629400" y="3913632"/>
+            <a:ext cx="5212080" cy="402336"/>
           </a:xfrm>
           <a:prstGeom prst="rect">
             <a:avLst/>
@@ -7835,7 +7937,7 @@
                   <a:srgbClr val="1A1A2E"/>
                 </a:solidFill>
               </a:rPr>
-              <a:t>Epochs: 100   |   Batch size: 512</a:t>
+              <a:t>에폭: 100  |  배치 크기: 512</a:t>
             </a:r>
           </a:p>
         </p:txBody>
@@ -7856,8 +7958,8 @@
         </p:blipFill>
         <p:spPr>
           <a:xfrm>
-            <a:off x="2011680" y="4572000"/>
-            <a:ext cx="8138160" cy="2011680"/>
+            <a:off x="2286000" y="4498848"/>
+            <a:ext cx="7589520" cy="2029968"/>
           </a:xfrm>
           <a:prstGeom prst="rect">
             <a:avLst/>
@@ -7872,8 +7974,8 @@
         </p:nvSpPr>
         <p:spPr>
           <a:xfrm>
-            <a:off x="2011680" y="6492240"/>
-            <a:ext cx="8138160" cy="274320"/>
+            <a:off x="2286000" y="6565392"/>
+            <a:ext cx="7589520" cy="256032"/>
           </a:xfrm>
           <a:prstGeom prst="rect">
             <a:avLst/>
@@ -7893,7 +7995,7 @@
                   <a:srgbClr val="555555"/>
                 </a:solidFill>
               </a:rPr>
-              <a:t>MLP training/validation MSE loss (log scale)</a:t>
+              <a:t>MLP 학습 곡선 (Train / Validation MSE, 로그 스케일)</a:t>
             </a:r>
           </a:p>
         </p:txBody>
@@ -7925,7 +8027,7 @@
         <p:spPr>
           <a:xfrm>
             <a:off x="0" y="0"/>
-            <a:ext cx="12188952" cy="1005840"/>
+            <a:ext cx="12188952" cy="960120"/>
           </a:xfrm>
           <a:prstGeom prst="rect">
             <a:avLst/>
@@ -7967,8 +8069,8 @@
         </p:nvSpPr>
         <p:spPr>
           <a:xfrm>
-            <a:off x="274320" y="109728"/>
-            <a:ext cx="10058400" cy="731520"/>
+            <a:off x="320040" y="91440"/>
+            <a:ext cx="11430000" cy="594360"/>
           </a:xfrm>
           <a:prstGeom prst="rect">
             <a:avLst/>
@@ -7983,12 +8085,12 @@
           <a:p>
             <a:pPr algn="l"/>
             <a:r>
-              <a:rPr sz="2800" b="1">
+              <a:rPr sz="2600" b="1">
                 <a:solidFill>
                   <a:srgbClr val="FFFFFF"/>
                 </a:solidFill>
               </a:rPr>
-              <a:t>Results</a:t>
+              <a:t>실험 결과</a:t>
             </a:r>
           </a:p>
         </p:txBody>
@@ -8001,8 +8103,8 @@
         </p:nvSpPr>
         <p:spPr>
           <a:xfrm>
-            <a:off x="274320" y="685800"/>
-            <a:ext cx="10058400" cy="457200"/>
+            <a:off x="320040" y="621792"/>
+            <a:ext cx="11430000" cy="347472"/>
           </a:xfrm>
           <a:prstGeom prst="rect">
             <a:avLst/>
@@ -8017,12 +8119,12 @@
           <a:p>
             <a:pPr algn="l"/>
             <a:r>
-              <a:rPr sz="1400" b="0">
-                <a:solidFill>
-                  <a:srgbClr val="AABBFF"/>
+              <a:rPr sz="1300" b="0">
+                <a:solidFill>
+                  <a:srgbClr val="AACCFF"/>
                 </a:solidFill>
               </a:rPr>
-              <a:t>Test set evaluation (15,000 samples)</a:t>
+              <a:t>테스트셋 성능 평가 (15,000 샘플)</a:t>
             </a:r>
           </a:p>
         </p:txBody>
@@ -8035,7 +8137,7 @@
         </p:nvSpPr>
         <p:spPr>
           <a:xfrm>
-            <a:off x="0" y="1005840"/>
+            <a:off x="0" y="960120"/>
             <a:ext cx="12188952" cy="36576"/>
           </a:xfrm>
           <a:prstGeom prst="rect">
@@ -8078,8 +8180,8 @@
         </p:nvSpPr>
         <p:spPr>
           <a:xfrm>
-            <a:off x="365760" y="1143000"/>
-            <a:ext cx="3474720" cy="484632"/>
+            <a:off x="320040" y="1078992"/>
+            <a:ext cx="3840480" cy="475488"/>
           </a:xfrm>
           <a:prstGeom prst="rect">
             <a:avLst/>
@@ -8121,8 +8223,8 @@
         </p:nvSpPr>
         <p:spPr>
           <a:xfrm>
-            <a:off x="411480" y="1188720"/>
-            <a:ext cx="3383279" cy="384048"/>
+            <a:off x="374904" y="1124712"/>
+            <a:ext cx="3730752" cy="402336"/>
           </a:xfrm>
           <a:prstGeom prst="rect">
             <a:avLst/>
@@ -8137,12 +8239,12 @@
           <a:p>
             <a:pPr algn="ctr"/>
             <a:r>
-              <a:rPr sz="1400" b="1">
+              <a:rPr sz="1200" b="1">
                 <a:solidFill>
                   <a:srgbClr val="FFFFFF"/>
                 </a:solidFill>
               </a:rPr>
-              <a:t>Model</a:t>
+              <a:t>모델</a:t>
             </a:r>
           </a:p>
         </p:txBody>
@@ -8155,8 +8257,8 @@
         </p:nvSpPr>
         <p:spPr>
           <a:xfrm>
-            <a:off x="3840480" y="1143000"/>
-            <a:ext cx="2286000" cy="484632"/>
+            <a:off x="4160520" y="1078992"/>
+            <a:ext cx="2377440" cy="475488"/>
           </a:xfrm>
           <a:prstGeom prst="rect">
             <a:avLst/>
@@ -8198,8 +8300,8 @@
         </p:nvSpPr>
         <p:spPr>
           <a:xfrm>
-            <a:off x="3886200" y="1188720"/>
-            <a:ext cx="2194560" cy="384048"/>
+            <a:off x="4215383" y="1124712"/>
+            <a:ext cx="2267712" cy="402336"/>
           </a:xfrm>
           <a:prstGeom prst="rect">
             <a:avLst/>
@@ -8214,7 +8316,7 @@
           <a:p>
             <a:pPr algn="ctr"/>
             <a:r>
-              <a:rPr sz="1400" b="1">
+              <a:rPr sz="1200" b="1">
                 <a:solidFill>
                   <a:srgbClr val="FFFFFF"/>
                 </a:solidFill>
@@ -8232,8 +8334,8 @@
         </p:nvSpPr>
         <p:spPr>
           <a:xfrm>
-            <a:off x="6126480" y="1143000"/>
-            <a:ext cx="2651760" cy="484632"/>
+            <a:off x="6537960" y="1078992"/>
+            <a:ext cx="2834640" cy="475488"/>
           </a:xfrm>
           <a:prstGeom prst="rect">
             <a:avLst/>
@@ -8275,8 +8377,8 @@
         </p:nvSpPr>
         <p:spPr>
           <a:xfrm>
-            <a:off x="6172200" y="1188720"/>
-            <a:ext cx="2560320" cy="384048"/>
+            <a:off x="6592824" y="1124712"/>
+            <a:ext cx="2724912" cy="402336"/>
           </a:xfrm>
           <a:prstGeom prst="rect">
             <a:avLst/>
@@ -8291,7 +8393,7 @@
           <a:p>
             <a:pPr algn="ctr"/>
             <a:r>
-              <a:rPr sz="1400" b="1">
+              <a:rPr sz="1200" b="1">
                 <a:solidFill>
                   <a:srgbClr val="FFFFFF"/>
                 </a:solidFill>
@@ -8309,8 +8411,8 @@
         </p:nvSpPr>
         <p:spPr>
           <a:xfrm>
-            <a:off x="8778240" y="1143000"/>
-            <a:ext cx="2286000" cy="484632"/>
+            <a:off x="9372600" y="1078992"/>
+            <a:ext cx="2377440" cy="475488"/>
           </a:xfrm>
           <a:prstGeom prst="rect">
             <a:avLst/>
@@ -8352,8 +8454,8 @@
         </p:nvSpPr>
         <p:spPr>
           <a:xfrm>
-            <a:off x="8823960" y="1188720"/>
-            <a:ext cx="2194560" cy="384048"/>
+            <a:off x="9427464" y="1124712"/>
+            <a:ext cx="2267712" cy="402336"/>
           </a:xfrm>
           <a:prstGeom prst="rect">
             <a:avLst/>
@@ -8368,12 +8470,12 @@
           <a:p>
             <a:pPr algn="ctr"/>
             <a:r>
-              <a:rPr sz="1400" b="1">
+              <a:rPr sz="1200" b="1">
                 <a:solidFill>
                   <a:srgbClr val="FFFFFF"/>
                 </a:solidFill>
               </a:rPr>
-              <a:t>Mean RMSE</a:t>
+              <a:t>평균 RMSE</a:t>
             </a:r>
           </a:p>
         </p:txBody>
@@ -8386,8 +8488,8 @@
         </p:nvSpPr>
         <p:spPr>
           <a:xfrm>
-            <a:off x="365760" y="1645920"/>
-            <a:ext cx="3474720" cy="484632"/>
+            <a:off x="320040" y="1554480"/>
+            <a:ext cx="3840480" cy="475488"/>
           </a:xfrm>
           <a:prstGeom prst="rect">
             <a:avLst/>
@@ -8429,8 +8531,8 @@
         </p:nvSpPr>
         <p:spPr>
           <a:xfrm>
-            <a:off x="411480" y="1691640"/>
-            <a:ext cx="3383279" cy="384048"/>
+            <a:off x="374904" y="1600200"/>
+            <a:ext cx="3730752" cy="402336"/>
           </a:xfrm>
           <a:prstGeom prst="rect">
             <a:avLst/>
@@ -8445,7 +8547,7 @@
           <a:p>
             <a:pPr algn="ctr"/>
             <a:r>
-              <a:rPr sz="1400" b="0">
+              <a:rPr sz="1200" b="0">
                 <a:solidFill>
                   <a:srgbClr val="1A1A2E"/>
                 </a:solidFill>
@@ -8463,8 +8565,8 @@
         </p:nvSpPr>
         <p:spPr>
           <a:xfrm>
-            <a:off x="3840480" y="1645920"/>
-            <a:ext cx="2286000" cy="484632"/>
+            <a:off x="4160520" y="1554480"/>
+            <a:ext cx="2377440" cy="475488"/>
           </a:xfrm>
           <a:prstGeom prst="rect">
             <a:avLst/>
@@ -8506,8 +8608,8 @@
         </p:nvSpPr>
         <p:spPr>
           <a:xfrm>
-            <a:off x="3886200" y="1691640"/>
-            <a:ext cx="2194560" cy="384048"/>
+            <a:off x="4215383" y="1600200"/>
+            <a:ext cx="2267712" cy="402336"/>
           </a:xfrm>
           <a:prstGeom prst="rect">
             <a:avLst/>
@@ -8522,7 +8624,7 @@
           <a:p>
             <a:pPr algn="ctr"/>
             <a:r>
-              <a:rPr sz="1400" b="0">
+              <a:rPr sz="1200" b="0">
                 <a:solidFill>
                   <a:srgbClr val="1A1A2E"/>
                 </a:solidFill>
@@ -8540,8 +8642,8 @@
         </p:nvSpPr>
         <p:spPr>
           <a:xfrm>
-            <a:off x="6126480" y="1645920"/>
-            <a:ext cx="2651760" cy="484632"/>
+            <a:off x="6537960" y="1554480"/>
+            <a:ext cx="2834640" cy="475488"/>
           </a:xfrm>
           <a:prstGeom prst="rect">
             <a:avLst/>
@@ -8583,8 +8685,8 @@
         </p:nvSpPr>
         <p:spPr>
           <a:xfrm>
-            <a:off x="6172200" y="1691640"/>
-            <a:ext cx="2560320" cy="384048"/>
+            <a:off x="6592824" y="1600200"/>
+            <a:ext cx="2724912" cy="402336"/>
           </a:xfrm>
           <a:prstGeom prst="rect">
             <a:avLst/>
@@ -8599,7 +8701,7 @@
           <a:p>
             <a:pPr algn="ctr"/>
             <a:r>
-              <a:rPr sz="1400" b="0">
+              <a:rPr sz="1200" b="0">
                 <a:solidFill>
                   <a:srgbClr val="1A1A2E"/>
                 </a:solidFill>
@@ -8617,8 +8719,8 @@
         </p:nvSpPr>
         <p:spPr>
           <a:xfrm>
-            <a:off x="8778240" y="1645920"/>
-            <a:ext cx="2286000" cy="484632"/>
+            <a:off x="9372600" y="1554480"/>
+            <a:ext cx="2377440" cy="475488"/>
           </a:xfrm>
           <a:prstGeom prst="rect">
             <a:avLst/>
@@ -8660,8 +8762,8 @@
         </p:nvSpPr>
         <p:spPr>
           <a:xfrm>
-            <a:off x="8823960" y="1691640"/>
-            <a:ext cx="2194560" cy="384048"/>
+            <a:off x="9427464" y="1600200"/>
+            <a:ext cx="2267712" cy="402336"/>
           </a:xfrm>
           <a:prstGeom prst="rect">
             <a:avLst/>
@@ -8676,7 +8778,7 @@
           <a:p>
             <a:pPr algn="ctr"/>
             <a:r>
-              <a:rPr sz="1400" b="0">
+              <a:rPr sz="1200" b="0">
                 <a:solidFill>
                   <a:srgbClr val="1A1A2E"/>
                 </a:solidFill>
@@ -8694,14 +8796,14 @@
         </p:nvSpPr>
         <p:spPr>
           <a:xfrm>
-            <a:off x="365760" y="2148840"/>
-            <a:ext cx="3474720" cy="484632"/>
+            <a:off x="320040" y="2029967"/>
+            <a:ext cx="3840480" cy="475488"/>
           </a:xfrm>
           <a:prstGeom prst="rect">
             <a:avLst/>
           </a:prstGeom>
           <a:solidFill>
-            <a:srgbClr val="E8F4E8"/>
+            <a:srgbClr val="F0F0F0"/>
           </a:solidFill>
           <a:ln>
             <a:noFill/>
@@ -8737,8 +8839,8 @@
         </p:nvSpPr>
         <p:spPr>
           <a:xfrm>
-            <a:off x="411480" y="2194560"/>
-            <a:ext cx="3383279" cy="384048"/>
+            <a:off x="374904" y="2075687"/>
+            <a:ext cx="3730752" cy="402336"/>
           </a:xfrm>
           <a:prstGeom prst="rect">
             <a:avLst/>
@@ -8753,7 +8855,7 @@
           <a:p>
             <a:pPr algn="ctr"/>
             <a:r>
-              <a:rPr sz="1400" b="0">
+              <a:rPr sz="1200" b="0">
                 <a:solidFill>
                   <a:srgbClr val="1A1A2E"/>
                 </a:solidFill>
@@ -8771,14 +8873,14 @@
         </p:nvSpPr>
         <p:spPr>
           <a:xfrm>
-            <a:off x="3840480" y="2148840"/>
-            <a:ext cx="2286000" cy="484632"/>
+            <a:off x="4160520" y="2029967"/>
+            <a:ext cx="2377440" cy="475488"/>
           </a:xfrm>
           <a:prstGeom prst="rect">
             <a:avLst/>
           </a:prstGeom>
           <a:solidFill>
-            <a:srgbClr val="E8F4E8"/>
+            <a:srgbClr val="F0F0F0"/>
           </a:solidFill>
           <a:ln>
             <a:noFill/>
@@ -8814,8 +8916,8 @@
         </p:nvSpPr>
         <p:spPr>
           <a:xfrm>
-            <a:off x="3886200" y="2194560"/>
-            <a:ext cx="2194560" cy="384048"/>
+            <a:off x="4215383" y="2075687"/>
+            <a:ext cx="2267712" cy="402336"/>
           </a:xfrm>
           <a:prstGeom prst="rect">
             <a:avLst/>
@@ -8830,7 +8932,7 @@
           <a:p>
             <a:pPr algn="ctr"/>
             <a:r>
-              <a:rPr sz="1400" b="0">
+              <a:rPr sz="1200" b="0">
                 <a:solidFill>
                   <a:srgbClr val="1A1A2E"/>
                 </a:solidFill>
@@ -8848,14 +8950,14 @@
         </p:nvSpPr>
         <p:spPr>
           <a:xfrm>
-            <a:off x="6126480" y="2148840"/>
-            <a:ext cx="2651760" cy="484632"/>
+            <a:off x="6537960" y="2029967"/>
+            <a:ext cx="2834640" cy="475488"/>
           </a:xfrm>
           <a:prstGeom prst="rect">
             <a:avLst/>
           </a:prstGeom>
           <a:solidFill>
-            <a:srgbClr val="E8F4E8"/>
+            <a:srgbClr val="F0F0F0"/>
           </a:solidFill>
           <a:ln>
             <a:noFill/>
@@ -8891,8 +8993,8 @@
         </p:nvSpPr>
         <p:spPr>
           <a:xfrm>
-            <a:off x="6172200" y="2194560"/>
-            <a:ext cx="2560320" cy="384048"/>
+            <a:off x="6592824" y="2075687"/>
+            <a:ext cx="2724912" cy="402336"/>
           </a:xfrm>
           <a:prstGeom prst="rect">
             <a:avLst/>
@@ -8907,7 +9009,7 @@
           <a:p>
             <a:pPr algn="ctr"/>
             <a:r>
-              <a:rPr sz="1400" b="0">
+              <a:rPr sz="1200" b="0">
                 <a:solidFill>
                   <a:srgbClr val="1A1A2E"/>
                 </a:solidFill>
@@ -8925,14 +9027,14 @@
         </p:nvSpPr>
         <p:spPr>
           <a:xfrm>
-            <a:off x="8778240" y="2148840"/>
-            <a:ext cx="2286000" cy="484632"/>
+            <a:off x="9372600" y="2029967"/>
+            <a:ext cx="2377440" cy="475488"/>
           </a:xfrm>
           <a:prstGeom prst="rect">
             <a:avLst/>
           </a:prstGeom>
           <a:solidFill>
-            <a:srgbClr val="E8F4E8"/>
+            <a:srgbClr val="F0F0F0"/>
           </a:solidFill>
           <a:ln>
             <a:noFill/>
@@ -8968,8 +9070,8 @@
         </p:nvSpPr>
         <p:spPr>
           <a:xfrm>
-            <a:off x="8823960" y="2194560"/>
-            <a:ext cx="2194560" cy="384048"/>
+            <a:off x="9427464" y="2075687"/>
+            <a:ext cx="2267712" cy="402336"/>
           </a:xfrm>
           <a:prstGeom prst="rect">
             <a:avLst/>
@@ -8984,7 +9086,7 @@
           <a:p>
             <a:pPr algn="ctr"/>
             <a:r>
-              <a:rPr sz="1400" b="0">
+              <a:rPr sz="1200" b="0">
                 <a:solidFill>
                   <a:srgbClr val="1A1A2E"/>
                 </a:solidFill>
@@ -9002,8 +9104,8 @@
         </p:nvSpPr>
         <p:spPr>
           <a:xfrm>
-            <a:off x="365760" y="2606040"/>
-            <a:ext cx="11430000" cy="457200"/>
+            <a:off x="320040" y="2578608"/>
+            <a:ext cx="11521440" cy="457200"/>
           </a:xfrm>
           <a:prstGeom prst="rect">
             <a:avLst/>
@@ -9018,12 +9120,12 @@
           <a:p>
             <a:pPr algn="l"/>
             <a:r>
-              <a:rPr sz="1600" b="1">
+              <a:rPr sz="1500" b="1">
                 <a:solidFill>
                   <a:srgbClr val="1B873B"/>
                 </a:solidFill>
               </a:rPr>
-              <a:t>★  MLP achieves R² &gt; 0.99 on BOTH targets</a:t>
+              <a:t>★  MLP: 두 목표 변수 모두 R² &gt; 0.99 달성 (평균 RMSE = 1.4×10⁻³)</a:t>
             </a:r>
           </a:p>
         </p:txBody>
@@ -9044,8 +9146,8 @@
         </p:blipFill>
         <p:spPr>
           <a:xfrm>
-            <a:off x="365760" y="3017520"/>
-            <a:ext cx="11430000" cy="3474720"/>
+            <a:off x="822960" y="3063240"/>
+            <a:ext cx="10515600" cy="3520440"/>
           </a:xfrm>
           <a:prstGeom prst="rect">
             <a:avLst/>
@@ -9079,7 +9181,7 @@
         <p:spPr>
           <a:xfrm>
             <a:off x="0" y="0"/>
-            <a:ext cx="12188952" cy="1005840"/>
+            <a:ext cx="12188952" cy="960120"/>
           </a:xfrm>
           <a:prstGeom prst="rect">
             <a:avLst/>
@@ -9121,8 +9223,8 @@
         </p:nvSpPr>
         <p:spPr>
           <a:xfrm>
-            <a:off x="274320" y="109728"/>
-            <a:ext cx="10058400" cy="731520"/>
+            <a:off x="320040" y="91440"/>
+            <a:ext cx="11430000" cy="594360"/>
           </a:xfrm>
           <a:prstGeom prst="rect">
             <a:avLst/>
@@ -9137,12 +9239,12 @@
           <a:p>
             <a:pPr algn="l"/>
             <a:r>
-              <a:rPr sz="2800" b="1">
+              <a:rPr sz="2600" b="1">
                 <a:solidFill>
                   <a:srgbClr val="FFFFFF"/>
                 </a:solidFill>
               </a:rPr>
-              <a:t>Prediction Analysis</a:t>
+              <a:t>예측값 vs. 실제값 산점도</a:t>
             </a:r>
           </a:p>
         </p:txBody>
@@ -9155,8 +9257,8 @@
         </p:nvSpPr>
         <p:spPr>
           <a:xfrm>
-            <a:off x="274320" y="685800"/>
-            <a:ext cx="10058400" cy="457200"/>
+            <a:off x="320040" y="621792"/>
+            <a:ext cx="11430000" cy="347472"/>
           </a:xfrm>
           <a:prstGeom prst="rect">
             <a:avLst/>
@@ -9171,12 +9273,12 @@
           <a:p>
             <a:pPr algn="l"/>
             <a:r>
-              <a:rPr sz="1400" b="0">
-                <a:solidFill>
-                  <a:srgbClr val="AABBFF"/>
+              <a:rPr sz="1300" b="0">
+                <a:solidFill>
+                  <a:srgbClr val="AACCFF"/>
                 </a:solidFill>
               </a:rPr>
-              <a:t>True vs Predicted &amp; Residuals</a:t>
+              <a:t>두 모델의 예측 정확도 비교</a:t>
             </a:r>
           </a:p>
         </p:txBody>
@@ -9189,7 +9291,7 @@
         </p:nvSpPr>
         <p:spPr>
           <a:xfrm>
-            <a:off x="0" y="1005840"/>
+            <a:off x="0" y="960120"/>
             <a:ext cx="12188952" cy="36576"/>
           </a:xfrm>
           <a:prstGeom prst="rect">
@@ -9240,8 +9342,8 @@
         </p:blipFill>
         <p:spPr>
           <a:xfrm>
-            <a:off x="182880" y="1097280"/>
-            <a:ext cx="5852160" cy="2743200"/>
+            <a:off x="228600" y="1078992"/>
+            <a:ext cx="5806440" cy="2651760"/>
           </a:xfrm>
           <a:prstGeom prst="rect">
             <a:avLst/>
@@ -9256,8 +9358,8 @@
         </p:nvSpPr>
         <p:spPr>
           <a:xfrm>
-            <a:off x="182880" y="3886200"/>
-            <a:ext cx="5852160" cy="365760"/>
+            <a:off x="228600" y="3767328"/>
+            <a:ext cx="5806440" cy="347472"/>
           </a:xfrm>
           <a:prstGeom prst="rect">
             <a:avLst/>
@@ -9277,7 +9379,7 @@
                   <a:srgbClr val="555555"/>
                 </a:solidFill>
               </a:rPr>
-              <a:t>err_theta: True vs Predicted</a:t>
+              <a:t>err_theta (각도 오차)</a:t>
             </a:r>
           </a:p>
         </p:txBody>
@@ -9298,8 +9400,8 @@
         </p:blipFill>
         <p:spPr>
           <a:xfrm>
-            <a:off x="6126480" y="1097280"/>
-            <a:ext cx="5852160" cy="2743200"/>
+            <a:off x="6172200" y="1078992"/>
+            <a:ext cx="5806440" cy="2651760"/>
           </a:xfrm>
           <a:prstGeom prst="rect">
             <a:avLst/>
@@ -9314,8 +9416,8 @@
         </p:nvSpPr>
         <p:spPr>
           <a:xfrm>
-            <a:off x="6126480" y="3886200"/>
-            <a:ext cx="5852160" cy="365760"/>
+            <a:off x="6172200" y="3767328"/>
+            <a:ext cx="5806440" cy="347472"/>
           </a:xfrm>
           <a:prstGeom prst="rect">
             <a:avLst/>
@@ -9335,7 +9437,7 @@
                   <a:srgbClr val="555555"/>
                 </a:solidFill>
               </a:rPr>
-              <a:t>err_theta_dot: True vs Predicted</a:t>
+              <a:t>err_theta_dot (각속도 오차)</a:t>
             </a:r>
           </a:p>
         </p:txBody>
@@ -9356,8 +9458,8 @@
         </p:blipFill>
         <p:spPr>
           <a:xfrm>
-            <a:off x="457200" y="4206240"/>
-            <a:ext cx="11247120" cy="2377440"/>
+            <a:off x="1097280" y="4187952"/>
+            <a:ext cx="9966960" cy="2423160"/>
           </a:xfrm>
           <a:prstGeom prst="rect">
             <a:avLst/>
@@ -9372,8 +9474,8 @@
         </p:nvSpPr>
         <p:spPr>
           <a:xfrm>
-            <a:off x="457200" y="6537960"/>
-            <a:ext cx="11247120" cy="274320"/>
+            <a:off x="1097280" y="6601968"/>
+            <a:ext cx="9966960" cy="256032"/>
           </a:xfrm>
           <a:prstGeom prst="rect">
             <a:avLst/>
@@ -9393,7 +9495,7 @@
                   <a:srgbClr val="555555"/>
                 </a:solidFill>
               </a:rPr>
-              <a:t>Residual distributions — MLP residuals are tightly centred at zero</a:t>
+              <a:t>잔차 분포: MLP 잔차는 0에 좁게 집중, Linear Regression은 err_theta_dot에서 넓은 꼬리</a:t>
             </a:r>
           </a:p>
         </p:txBody>
@@ -9425,7 +9527,7 @@
         <p:spPr>
           <a:xfrm>
             <a:off x="0" y="0"/>
-            <a:ext cx="12188952" cy="1005840"/>
+            <a:ext cx="12188952" cy="960120"/>
           </a:xfrm>
           <a:prstGeom prst="rect">
             <a:avLst/>
@@ -9467,8 +9569,8 @@
         </p:nvSpPr>
         <p:spPr>
           <a:xfrm>
-            <a:off x="274320" y="109728"/>
-            <a:ext cx="10058400" cy="731520"/>
+            <a:off x="320040" y="91440"/>
+            <a:ext cx="11430000" cy="594360"/>
           </a:xfrm>
           <a:prstGeom prst="rect">
             <a:avLst/>
@@ -9483,12 +9585,12 @@
           <a:p>
             <a:pPr algn="l"/>
             <a:r>
-              <a:rPr sz="2800" b="1">
+              <a:rPr sz="2600" b="1">
                 <a:solidFill>
                   <a:srgbClr val="FFFFFF"/>
                 </a:solidFill>
               </a:rPr>
-              <a:t>Discussion</a:t>
+              <a:t>결과 분석 및 토론</a:t>
             </a:r>
           </a:p>
         </p:txBody>
@@ -9501,7 +9603,7 @@
         </p:nvSpPr>
         <p:spPr>
           <a:xfrm>
-            <a:off x="0" y="1005840"/>
+            <a:off x="0" y="960120"/>
             <a:ext cx="12188952" cy="36576"/>
           </a:xfrm>
           <a:prstGeom prst="rect">
@@ -9544,8 +9646,8 @@
         </p:nvSpPr>
         <p:spPr>
           <a:xfrm>
-            <a:off x="365760" y="1143000"/>
-            <a:ext cx="11430000" cy="411480"/>
+            <a:off x="320040" y="1115568"/>
+            <a:ext cx="11521440" cy="420624"/>
           </a:xfrm>
           <a:prstGeom prst="rect">
             <a:avLst/>
@@ -9587,8 +9689,8 @@
         </p:nvSpPr>
         <p:spPr>
           <a:xfrm>
-            <a:off x="502920" y="1179576"/>
-            <a:ext cx="11155680" cy="347472"/>
+            <a:off x="502920" y="1161288"/>
+            <a:ext cx="11247120" cy="338328"/>
           </a:xfrm>
           <a:prstGeom prst="rect">
             <a:avLst/>
@@ -9608,7 +9710,7 @@
                   <a:srgbClr val="FFFFFF"/>
                 </a:solidFill>
               </a:rPr>
-              <a:t>Why does MLP win?</a:t>
+              <a:t>왜 MLP가 우수한가?</a:t>
             </a:r>
           </a:p>
         </p:txBody>
@@ -9621,8 +9723,8 @@
         </p:nvSpPr>
         <p:spPr>
           <a:xfrm>
-            <a:off x="502920" y="1645920"/>
-            <a:ext cx="73152" cy="256032"/>
+            <a:off x="457200" y="1636776"/>
+            <a:ext cx="82296" cy="256032"/>
           </a:xfrm>
           <a:prstGeom prst="rect">
             <a:avLst/>
@@ -9664,8 +9766,8 @@
         </p:nvSpPr>
         <p:spPr>
           <a:xfrm>
-            <a:off x="685800" y="1600200"/>
-            <a:ext cx="11064240" cy="347472"/>
+            <a:off x="640080" y="1591056"/>
+            <a:ext cx="11064240" cy="384048"/>
           </a:xfrm>
           <a:prstGeom prst="rect">
             <a:avLst/>
@@ -9685,7 +9787,7 @@
                   <a:srgbClr val="1A1A2E"/>
                 </a:solidFill>
               </a:rPr>
-              <a:t>The integration error depends on sin(θ) — a nonlinear function.</a:t>
+              <a:t>err_theta_dot는 sin(θ)에 비선형 의존 → 선형 모델로는 학습 불가.</a:t>
             </a:r>
           </a:p>
         </p:txBody>
@@ -9698,8 +9800,8 @@
         </p:nvSpPr>
         <p:spPr>
           <a:xfrm>
-            <a:off x="502920" y="2029967"/>
-            <a:ext cx="73152" cy="256032"/>
+            <a:off x="457200" y="2039112"/>
+            <a:ext cx="82296" cy="256032"/>
           </a:xfrm>
           <a:prstGeom prst="rect">
             <a:avLst/>
@@ -9741,8 +9843,8 @@
         </p:nvSpPr>
         <p:spPr>
           <a:xfrm>
-            <a:off x="685800" y="1984248"/>
-            <a:ext cx="11064240" cy="347472"/>
+            <a:off x="640080" y="1993392"/>
+            <a:ext cx="11064240" cy="384048"/>
           </a:xfrm>
           <a:prstGeom prst="rect">
             <a:avLst/>
@@ -9762,7 +9864,7 @@
                   <a:srgbClr val="1A1A2E"/>
                 </a:solidFill>
               </a:rPr>
-              <a:t>LR captures err_theta well (dominant linear term θ̇) but fails for err_theta_dot.</a:t>
+              <a:t>MLP의 ReLU 활성화 함수가 비선형 오차 곡면을 효과적으로 근사.</a:t>
             </a:r>
           </a:p>
         </p:txBody>
@@ -9775,8 +9877,8 @@
         </p:nvSpPr>
         <p:spPr>
           <a:xfrm>
-            <a:off x="502920" y="2414015"/>
-            <a:ext cx="73152" cy="256032"/>
+            <a:off x="457200" y="2441448"/>
+            <a:ext cx="82296" cy="256032"/>
           </a:xfrm>
           <a:prstGeom prst="rect">
             <a:avLst/>
@@ -9818,8 +9920,8 @@
         </p:nvSpPr>
         <p:spPr>
           <a:xfrm>
-            <a:off x="685800" y="2368296"/>
-            <a:ext cx="11064240" cy="347472"/>
+            <a:off x="640080" y="2395728"/>
+            <a:ext cx="11064240" cy="384048"/>
           </a:xfrm>
           <a:prstGeom prst="rect">
             <a:avLst/>
@@ -9839,7 +9941,7 @@
                   <a:srgbClr val="1A1A2E"/>
                 </a:solidFill>
               </a:rPr>
-              <a:t>MLP's ReLU layers approximate the nonlinear error surface accurately.</a:t>
+              <a:t>err_theta는 θ̇에 선형 → LR도 R²=0.99 달성.</a:t>
             </a:r>
           </a:p>
         </p:txBody>
@@ -9852,8 +9954,8 @@
         </p:nvSpPr>
         <p:spPr>
           <a:xfrm>
-            <a:off x="365760" y="2889503"/>
-            <a:ext cx="11430000" cy="411480"/>
+            <a:off x="320040" y="2907792"/>
+            <a:ext cx="11521440" cy="420624"/>
           </a:xfrm>
           <a:prstGeom prst="rect">
             <a:avLst/>
@@ -9895,8 +9997,8 @@
         </p:nvSpPr>
         <p:spPr>
           <a:xfrm>
-            <a:off x="502920" y="2926079"/>
-            <a:ext cx="11155680" cy="347472"/>
+            <a:off x="502920" y="2953512"/>
+            <a:ext cx="11247120" cy="338328"/>
           </a:xfrm>
           <a:prstGeom prst="rect">
             <a:avLst/>
@@ -9916,7 +10018,7 @@
                   <a:srgbClr val="FFFFFF"/>
                 </a:solidFill>
               </a:rPr>
-              <a:t>Failure modes</a:t>
+              <a:t>실패 사례 (Failure Modes)</a:t>
             </a:r>
           </a:p>
         </p:txBody>
@@ -9929,8 +10031,8 @@
         </p:nvSpPr>
         <p:spPr>
           <a:xfrm>
-            <a:off x="502920" y="3392423"/>
-            <a:ext cx="73152" cy="256032"/>
+            <a:off x="457200" y="3429000"/>
+            <a:ext cx="82296" cy="256032"/>
           </a:xfrm>
           <a:prstGeom prst="rect">
             <a:avLst/>
@@ -9972,8 +10074,8 @@
         </p:nvSpPr>
         <p:spPr>
           <a:xfrm>
-            <a:off x="685800" y="3346703"/>
-            <a:ext cx="11064240" cy="347472"/>
+            <a:off x="640080" y="3383280"/>
+            <a:ext cx="11064240" cy="384048"/>
           </a:xfrm>
           <a:prstGeom prst="rect">
             <a:avLst/>
@@ -9993,7 +10095,7 @@
                   <a:srgbClr val="1A1A2E"/>
                 </a:solidFill>
               </a:rPr>
-              <a:t>Large residuals near |θ̇| ≈ 8 rad/s (velocity clipping = hard discontinuity).</a:t>
+              <a:t>|θ̇| ≈ 8 rad/s 근방: clip 연산으로 생기는 급격한 불연속점에서 오차 큼.</a:t>
             </a:r>
           </a:p>
         </p:txBody>
@@ -10006,8 +10108,8 @@
         </p:nvSpPr>
         <p:spPr>
           <a:xfrm>
-            <a:off x="502920" y="3776472"/>
-            <a:ext cx="73152" cy="256032"/>
+            <a:off x="457200" y="3831336"/>
+            <a:ext cx="82296" cy="256032"/>
           </a:xfrm>
           <a:prstGeom prst="rect">
             <a:avLst/>
@@ -10049,8 +10151,8 @@
         </p:nvSpPr>
         <p:spPr>
           <a:xfrm>
-            <a:off x="685800" y="3730752"/>
-            <a:ext cx="11064240" cy="347472"/>
+            <a:off x="640080" y="3785615"/>
+            <a:ext cx="11064240" cy="384048"/>
           </a:xfrm>
           <a:prstGeom prst="rect">
             <a:avLst/>
@@ -10070,7 +10172,7 @@
                   <a:srgbClr val="1A1A2E"/>
                 </a:solidFill>
               </a:rPr>
-              <a:t>Upright position (θ ≈ 0) has the largest 2nd derivative → biggest Euler error.</a:t>
+              <a:t>θ ≈ 0 (직립) 근방: 2차 미분 최대 → Euler 오차 최대 → 예측 난이도 증가.</a:t>
             </a:r>
           </a:p>
         </p:txBody>
@@ -10083,8 +10185,8 @@
         </p:nvSpPr>
         <p:spPr>
           <a:xfrm>
-            <a:off x="502920" y="4160520"/>
-            <a:ext cx="73152" cy="256032"/>
+            <a:off x="457200" y="4233672"/>
+            <a:ext cx="82296" cy="256032"/>
           </a:xfrm>
           <a:prstGeom prst="rect">
             <a:avLst/>
@@ -10126,8 +10228,8 @@
         </p:nvSpPr>
         <p:spPr>
           <a:xfrm>
-            <a:off x="685800" y="4114800"/>
-            <a:ext cx="11064240" cy="347472"/>
+            <a:off x="640080" y="4187952"/>
+            <a:ext cx="11064240" cy="384048"/>
           </a:xfrm>
           <a:prstGeom prst="rect">
             <a:avLst/>
@@ -10147,7 +10249,7 @@
                   <a:srgbClr val="1A1A2E"/>
                 </a:solidFill>
               </a:rPr>
-              <a:t>Both models slightly underpredict extreme error values.</a:t>
+              <a:t>두 모델 모두 극단값을 약간 과소 예측하는 경향.</a:t>
             </a:r>
           </a:p>
         </p:txBody>
@@ -10160,8 +10262,8 @@
         </p:nvSpPr>
         <p:spPr>
           <a:xfrm>
-            <a:off x="365760" y="4636008"/>
-            <a:ext cx="11430000" cy="411480"/>
+            <a:off x="320040" y="4700016"/>
+            <a:ext cx="11521440" cy="420624"/>
           </a:xfrm>
           <a:prstGeom prst="rect">
             <a:avLst/>
@@ -10203,8 +10305,8 @@
         </p:nvSpPr>
         <p:spPr>
           <a:xfrm>
-            <a:off x="502920" y="4672584"/>
-            <a:ext cx="11155680" cy="347472"/>
+            <a:off x="502920" y="4745736"/>
+            <a:ext cx="11247120" cy="338328"/>
           </a:xfrm>
           <a:prstGeom prst="rect">
             <a:avLst/>
@@ -10224,7 +10326,7 @@
                   <a:srgbClr val="FFFFFF"/>
                 </a:solidFill>
               </a:rPr>
-              <a:t>Future work</a:t>
+              <a:t>향후 연구 방향</a:t>
             </a:r>
           </a:p>
         </p:txBody>
@@ -10237,8 +10339,8 @@
         </p:nvSpPr>
         <p:spPr>
           <a:xfrm>
-            <a:off x="502920" y="5138928"/>
-            <a:ext cx="73152" cy="256032"/>
+            <a:off x="457200" y="5221224"/>
+            <a:ext cx="82296" cy="256032"/>
           </a:xfrm>
           <a:prstGeom prst="rect">
             <a:avLst/>
@@ -10280,8 +10382,8 @@
         </p:nvSpPr>
         <p:spPr>
           <a:xfrm>
-            <a:off x="685800" y="5093208"/>
-            <a:ext cx="11064240" cy="347472"/>
+            <a:off x="640080" y="5175504"/>
+            <a:ext cx="11064240" cy="384048"/>
           </a:xfrm>
           <a:prstGeom prst="rect">
             <a:avLst/>
@@ -10301,7 +10403,7 @@
                   <a:srgbClr val="1A1A2E"/>
                 </a:solidFill>
               </a:rPr>
-              <a:t>Add physics features: sin²(θ), θ̇·sin(θ) to boost LR baseline.</a:t>
+              <a:t>물리 기반 특성 추가: sin²(θ), θ̇·sin(θ) → LR 성능 향상 가능.</a:t>
             </a:r>
           </a:p>
         </p:txBody>
@@ -10314,8 +10416,8 @@
         </p:nvSpPr>
         <p:spPr>
           <a:xfrm>
-            <a:off x="502920" y="5522976"/>
-            <a:ext cx="73152" cy="256032"/>
+            <a:off x="457200" y="5623560"/>
+            <a:ext cx="82296" cy="256032"/>
           </a:xfrm>
           <a:prstGeom prst="rect">
             <a:avLst/>
@@ -10357,8 +10459,8 @@
         </p:nvSpPr>
         <p:spPr>
           <a:xfrm>
-            <a:off x="685800" y="5477256"/>
-            <a:ext cx="11064240" cy="347472"/>
+            <a:off x="640080" y="5577840"/>
+            <a:ext cx="11064240" cy="384048"/>
           </a:xfrm>
           <a:prstGeom prst="rect">
             <a:avLst/>
@@ -10378,7 +10480,7 @@
                   <a:srgbClr val="1A1A2E"/>
                 </a:solidFill>
               </a:rPr>
-              <a:t>Sequence model (LSTM) for multi-step error accumulation prediction.</a:t>
+              <a:t>LSTM/Transformer로 다중 스텝 오차 누적 예측.</a:t>
             </a:r>
           </a:p>
         </p:txBody>
@@ -10391,8 +10493,8 @@
         </p:nvSpPr>
         <p:spPr>
           <a:xfrm>
-            <a:off x="502920" y="5907024"/>
-            <a:ext cx="73152" cy="256032"/>
+            <a:off x="457200" y="6025896"/>
+            <a:ext cx="82296" cy="256032"/>
           </a:xfrm>
           <a:prstGeom prst="rect">
             <a:avLst/>
@@ -10434,8 +10536,8 @@
         </p:nvSpPr>
         <p:spPr>
           <a:xfrm>
-            <a:off x="685800" y="5861304"/>
-            <a:ext cx="11064240" cy="347472"/>
+            <a:off x="640080" y="5980176"/>
+            <a:ext cx="11064240" cy="384048"/>
           </a:xfrm>
           <a:prstGeom prst="rect">
             <a:avLst/>
@@ -10455,7 +10557,7 @@
                   <a:srgbClr val="1A1A2E"/>
                 </a:solidFill>
               </a:rPr>
-              <a:t>Integrate into MPC controller for closed-loop error compensation.</a:t>
+              <a:t>학습된 오차 모델을 MPC 컨트롤러에 통합하여 제어 성능 개선 검증.</a:t>
             </a:r>
           </a:p>
         </p:txBody>
@@ -10529,7 +10631,7 @@
         </p:nvSpPr>
         <p:spPr>
           <a:xfrm>
-            <a:off x="0" y="2651760"/>
+            <a:off x="0" y="2697480"/>
             <a:ext cx="12188952" cy="54864"/>
           </a:xfrm>
           <a:prstGeom prst="rect">
@@ -10572,8 +10674,8 @@
         </p:nvSpPr>
         <p:spPr>
           <a:xfrm>
-            <a:off x="914400" y="457200"/>
-            <a:ext cx="10332720" cy="731520"/>
+            <a:off x="914400" y="411480"/>
+            <a:ext cx="10332720" cy="822960"/>
           </a:xfrm>
           <a:prstGeom prst="rect">
             <a:avLst/>
@@ -10588,12 +10690,12 @@
           <a:p>
             <a:pPr algn="ctr"/>
             <a:r>
-              <a:rPr sz="3400" b="1">
+              <a:rPr sz="3800" b="1">
                 <a:solidFill>
                   <a:srgbClr val="FFFFFF"/>
                 </a:solidFill>
               </a:rPr>
-              <a:t>Conclusion</a:t>
+              <a:t>결론</a:t>
             </a:r>
           </a:p>
         </p:txBody>
@@ -10606,7 +10708,7 @@
         </p:nvSpPr>
         <p:spPr>
           <a:xfrm>
-            <a:off x="640080" y="2880360"/>
+            <a:off x="640080" y="2907792"/>
             <a:ext cx="10881360" cy="713232"/>
           </a:xfrm>
           <a:prstGeom prst="rect">
@@ -10649,7 +10751,7 @@
         </p:nvSpPr>
         <p:spPr>
           <a:xfrm>
-            <a:off x="822960" y="2944368"/>
+            <a:off x="868680" y="2980944"/>
             <a:ext cx="10515600" cy="502920"/>
           </a:xfrm>
           <a:prstGeom prst="rect">
@@ -10670,7 +10772,7 @@
                   <a:srgbClr val="DDEEFF"/>
                 </a:solidFill>
               </a:rPr>
-              <a:t>MLP [128→64→32] achieves R² &gt; 0.99 on both targets (RMSE = 1.4×10⁻³)</a:t>
+              <a:t>MLP [128→64→32] : 두 목표 모두 R² &gt; 0.99, 평균 RMSE = 1.4×10⁻³</a:t>
             </a:r>
           </a:p>
         </p:txBody>
@@ -10683,7 +10785,7 @@
         </p:nvSpPr>
         <p:spPr>
           <a:xfrm>
-            <a:off x="640080" y="3703320"/>
+            <a:off x="640080" y="3730752"/>
             <a:ext cx="10881360" cy="713232"/>
           </a:xfrm>
           <a:prstGeom prst="rect">
@@ -10726,7 +10828,7 @@
         </p:nvSpPr>
         <p:spPr>
           <a:xfrm>
-            <a:off x="822960" y="3767328"/>
+            <a:off x="868680" y="3803904"/>
             <a:ext cx="10515600" cy="502920"/>
           </a:xfrm>
           <a:prstGeom prst="rect">
@@ -10747,7 +10849,7 @@
                   <a:srgbClr val="DDEEFF"/>
                 </a:solidFill>
               </a:rPr>
-              <a:t>Integration error is a smooth, highly learnable function of state &amp; action</a:t>
+              <a:t>수치 적분 오차는 상태-행동 공간의 매끄럽고 학습 가능한 함수</a:t>
             </a:r>
           </a:p>
         </p:txBody>
@@ -10760,7 +10862,7 @@
         </p:nvSpPr>
         <p:spPr>
           <a:xfrm>
-            <a:off x="640080" y="4526280"/>
+            <a:off x="640080" y="4553712"/>
             <a:ext cx="10881360" cy="713232"/>
           </a:xfrm>
           <a:prstGeom prst="rect">
@@ -10803,7 +10905,7 @@
         </p:nvSpPr>
         <p:spPr>
           <a:xfrm>
-            <a:off x="822960" y="4590288"/>
+            <a:off x="868680" y="4626864"/>
             <a:ext cx="10515600" cy="502920"/>
           </a:xfrm>
           <a:prstGeom prst="rect">
@@ -10824,7 +10926,7 @@
                   <a:srgbClr val="DDEEFF"/>
                 </a:solidFill>
               </a:rPr>
-              <a:t>Linear Regression captures angle error (R²=0.99) but fails for velocity error (R²=0.52)</a:t>
+              <a:t>Linear Regression: err_theta(R²=0.99) ▶ 강함, err_theta_dot(R²=0.52) ▶ 약함</a:t>
             </a:r>
           </a:p>
         </p:txBody>
@@ -10837,7 +10939,7 @@
         </p:nvSpPr>
         <p:spPr>
           <a:xfrm>
-            <a:off x="640080" y="5349240"/>
+            <a:off x="640080" y="5376672"/>
             <a:ext cx="10881360" cy="713232"/>
           </a:xfrm>
           <a:prstGeom prst="rect">
@@ -10880,7 +10982,7 @@
         </p:nvSpPr>
         <p:spPr>
           <a:xfrm>
-            <a:off x="822960" y="5413248"/>
+            <a:off x="868680" y="5449824"/>
             <a:ext cx="10515600" cy="502920"/>
           </a:xfrm>
           <a:prstGeom prst="rect">
@@ -10901,7 +11003,7 @@
                   <a:srgbClr val="DDEEFF"/>
                 </a:solidFill>
               </a:rPr>
-              <a:t>Learned error model → sim-to-real transfer, error compensation, adaptive integration</a:t>
+              <a:t>학습된 오차 모델 → sim-to-real 전이 / 오차 보상 / 적응형 적분 활용 가능</a:t>
             </a:r>
           </a:p>
         </p:txBody>
@@ -10915,7 +11017,7 @@
         <p:spPr>
           <a:xfrm>
             <a:off x="914400" y="6492240"/>
-            <a:ext cx="10332720" cy="365760"/>
+            <a:ext cx="10332720" cy="347472"/>
           </a:xfrm>
           <a:prstGeom prst="rect">
             <a:avLst/>
@@ -10935,7 +11037,7 @@
                   <a:srgbClr val="7799CC"/>
                 </a:solidFill>
               </a:rPr>
-              <a:t>GitHub  |  Gymnasium  |  PyTorch  |  scikit-learn</a:t>
+              <a:t>GitHub: github.com/CupidJang/my_ml_project  |  Gymnasium  |  PyTorch  |  scikit-learn</a:t>
             </a:r>
           </a:p>
         </p:txBody>
